--- a/Presentation.pptx
+++ b/Presentation.pptx
@@ -73,24 +73,25 @@
             <a:noAutofit/>
           </a:bodyPr>
           <a:p>
-            <a:r>
-              <a:rPr b="0" lang="en-US" sz="1800" strike="noStrike" u="none">
-                <a:solidFill>
-                  <a:schemeClr val="dk1"/>
-                </a:solidFill>
-                <a:effectLst/>
-                <a:uFillTx/>
-                <a:latin typeface="Calibri"/>
+            <a:pPr algn="ctr"/>
+            <a:r>
+              <a:rPr b="0" lang="en-US" sz="4400" strike="noStrike" u="none">
+                <a:solidFill>
+                  <a:srgbClr val="000000"/>
+                </a:solidFill>
+                <a:effectLst/>
+                <a:uFillTx/>
+                <a:latin typeface="Arial"/>
               </a:rPr>
               <a:t>Click to move the slide</a:t>
             </a:r>
-            <a:endParaRPr b="0" lang="en-US" sz="1800" strike="noStrike" u="none">
-              <a:solidFill>
-                <a:schemeClr val="dk1"/>
-              </a:solidFill>
-              <a:effectLst/>
-              <a:uFillTx/>
-              <a:latin typeface="Calibri"/>
+            <a:endParaRPr b="0" lang="en-US" sz="4400" strike="noStrike" u="none">
+              <a:solidFill>
+                <a:srgbClr val="000000"/>
+              </a:solidFill>
+              <a:effectLst/>
+              <a:uFillTx/>
+              <a:latin typeface="Arial"/>
             </a:endParaRPr>
           </a:p>
         </p:txBody>
@@ -135,18 +136,7 @@
                 <a:uFillTx/>
                 <a:latin typeface="Arial"/>
               </a:rPr>
-              <a:t>Click to edit the </a:t>
-            </a:r>
-            <a:r>
-              <a:rPr b="0" lang="en-US" sz="2000" strike="noStrike" u="none">
-                <a:solidFill>
-                  <a:srgbClr val="000000"/>
-                </a:solidFill>
-                <a:effectLst/>
-                <a:uFillTx/>
-                <a:latin typeface="Arial"/>
-              </a:rPr>
-              <a:t>notes format</a:t>
+              <a:t>Click to edit the notes format</a:t>
             </a:r>
             <a:endParaRPr b="0" lang="en-US" sz="2000" strike="noStrike" u="none">
               <a:solidFill>
@@ -199,7 +189,7 @@
                 <a:uFillTx/>
                 <a:latin typeface="Times New Roman"/>
               </a:rPr>
-              <a:t> </a:t>
+              <a:t>&lt;header&gt;</a:t>
             </a:r>
             <a:endParaRPr b="0" lang="en-US" sz="1400" strike="noStrike" u="none">
               <a:solidFill>
@@ -265,7 +255,7 @@
                 <a:uFillTx/>
                 <a:latin typeface="Times New Roman"/>
               </a:rPr>
-              <a:t> </a:t>
+              <a:t>&lt;date/time&gt;</a:t>
             </a:r>
             <a:endParaRPr b="0" lang="en-US" sz="1400" strike="noStrike" u="none">
               <a:solidFill>
@@ -331,7 +321,7 @@
                 <a:uFillTx/>
                 <a:latin typeface="Times New Roman"/>
               </a:rPr>
-              <a:t> </a:t>
+              <a:t>&lt;footer&gt;</a:t>
             </a:r>
             <a:endParaRPr b="0" lang="en-US" sz="1400" strike="noStrike" u="none">
               <a:solidFill>
@@ -388,7 +378,7 @@
             <a:pPr indent="0" algn="r">
               <a:buNone/>
             </a:pPr>
-            <a:fld id="{DE9E5B25-2746-4C6D-94DC-85FDEB9EA00E}" type="slidenum">
+            <a:fld id="{D6C7D197-5E8A-462D-8637-4EE2CFF008FC}" type="slidenum">
               <a:rPr b="0" lang="en-US" sz="1400" strike="noStrike" u="none">
                 <a:solidFill>
                   <a:srgbClr val="000000"/>
@@ -397,7 +387,7 @@
                 <a:uFillTx/>
                 <a:latin typeface="Times New Roman"/>
               </a:rPr>
-              <a:t>1</a:t>
+              <a:t>&lt;number&gt;</a:t>
             </a:fld>
             <a:endParaRPr b="0" lang="en-US" sz="1400" strike="noStrike" u="none">
               <a:solidFill>
@@ -435,7 +425,7 @@
       </p:grpSpPr>
       <p:sp>
         <p:nvSpPr>
-          <p:cNvPr id="219" name="PlaceHolder 1"/>
+          <p:cNvPr id="220" name="PlaceHolder 1"/>
           <p:cNvSpPr>
             <a:spLocks noGrp="1"/>
           </p:cNvSpPr>
@@ -446,19 +436,19 @@
         <p:spPr>
           <a:xfrm>
             <a:off x="685800" y="1143000"/>
-            <a:ext cx="5486040" cy="3085920"/>
-          </a:xfrm>
-          <a:prstGeom prst="rect">
-            <a:avLst/>
-          </a:prstGeom>
-          <a:ln w="0">
-            <a:noFill/>
-          </a:ln>
-        </p:spPr>
-      </p:sp>
-      <p:sp>
-        <p:nvSpPr>
-          <p:cNvPr id="220" name="PlaceHolder 2"/>
+            <a:ext cx="5485680" cy="3085560"/>
+          </a:xfrm>
+          <a:prstGeom prst="rect">
+            <a:avLst/>
+          </a:prstGeom>
+          <a:ln w="0">
+            <a:noFill/>
+          </a:ln>
+        </p:spPr>
+      </p:sp>
+      <p:sp>
+        <p:nvSpPr>
+          <p:cNvPr id="221" name="PlaceHolder 2"/>
           <p:cNvSpPr>
             <a:spLocks noGrp="1"/>
           </p:cNvSpPr>
@@ -469,7 +459,7 @@
         <p:spPr>
           <a:xfrm>
             <a:off x="685800" y="4400640"/>
-            <a:ext cx="5486040" cy="3600000"/>
+            <a:ext cx="5485680" cy="3599640"/>
           </a:xfrm>
           <a:prstGeom prst="rect">
             <a:avLst/>
@@ -489,6 +479,9 @@
                 <a:spcPct val="100000"/>
               </a:lnSpc>
               <a:buNone/>
+              <a:tabLst>
+                <a:tab algn="l" pos="0"/>
+              </a:tabLst>
             </a:pPr>
             <a:r>
               <a:rPr b="0" lang="en-US" sz="2000" strike="noStrike" u="none">
@@ -514,7 +507,7 @@
       </p:sp>
       <p:sp>
         <p:nvSpPr>
-          <p:cNvPr id="221" name="PlaceHolder 3"/>
+          <p:cNvPr id="222" name="PlaceHolder 3"/>
           <p:cNvSpPr>
             <a:spLocks noGrp="1"/>
           </p:cNvSpPr>
@@ -525,7 +518,7 @@
         <p:spPr>
           <a:xfrm>
             <a:off x="3884760" y="8685360"/>
-            <a:ext cx="2971440" cy="458280"/>
+            <a:ext cx="2971080" cy="457920"/>
           </a:xfrm>
           <a:prstGeom prst="rect">
             <a:avLst/>
@@ -545,6 +538,9 @@
                 <a:spcPct val="100000"/>
               </a:lnSpc>
               <a:buNone/>
+              <a:tabLst>
+                <a:tab algn="l" pos="0"/>
+              </a:tabLst>
               <a:defRPr b="0" lang="en-US" sz="1200" strike="noStrike" u="none">
                 <a:solidFill>
                   <a:schemeClr val="dk1"/>
@@ -562,8 +558,11 @@
                 <a:spcPct val="100000"/>
               </a:lnSpc>
               <a:buNone/>
-            </a:pPr>
-            <a:fld id="{44D94A92-EE5A-4423-8A69-A121425D6B09}" type="slidenum">
+              <a:tabLst>
+                <a:tab algn="l" pos="0"/>
+              </a:tabLst>
+            </a:pPr>
+            <a:fld id="{FDC11A88-E2B9-4100-9736-D9A938EED4CB}" type="slidenum">
               <a:rPr b="0" lang="en-US" sz="1200" strike="noStrike" u="none">
                 <a:solidFill>
                   <a:schemeClr val="dk1"/>
@@ -610,7 +609,7 @@
       </p:grpSpPr>
       <p:sp>
         <p:nvSpPr>
-          <p:cNvPr id="246" name="PlaceHolder 1"/>
+          <p:cNvPr id="247" name="PlaceHolder 1"/>
           <p:cNvSpPr>
             <a:spLocks noGrp="1"/>
           </p:cNvSpPr>
@@ -621,19 +620,19 @@
         <p:spPr>
           <a:xfrm>
             <a:off x="685800" y="1143000"/>
-            <a:ext cx="5486040" cy="3085920"/>
-          </a:xfrm>
-          <a:prstGeom prst="rect">
-            <a:avLst/>
-          </a:prstGeom>
-          <a:ln w="0">
-            <a:noFill/>
-          </a:ln>
-        </p:spPr>
-      </p:sp>
-      <p:sp>
-        <p:nvSpPr>
-          <p:cNvPr id="247" name="PlaceHolder 2"/>
+            <a:ext cx="5485680" cy="3085560"/>
+          </a:xfrm>
+          <a:prstGeom prst="rect">
+            <a:avLst/>
+          </a:prstGeom>
+          <a:ln w="0">
+            <a:noFill/>
+          </a:ln>
+        </p:spPr>
+      </p:sp>
+      <p:sp>
+        <p:nvSpPr>
+          <p:cNvPr id="248" name="PlaceHolder 2"/>
           <p:cNvSpPr>
             <a:spLocks noGrp="1"/>
           </p:cNvSpPr>
@@ -644,7 +643,7 @@
         <p:spPr>
           <a:xfrm>
             <a:off x="685800" y="4400640"/>
-            <a:ext cx="5486040" cy="3600000"/>
+            <a:ext cx="5485680" cy="3599640"/>
           </a:xfrm>
           <a:prstGeom prst="rect">
             <a:avLst/>
@@ -664,6 +663,9 @@
                 <a:spcPct val="100000"/>
               </a:lnSpc>
               <a:buNone/>
+              <a:tabLst>
+                <a:tab algn="l" pos="0"/>
+              </a:tabLst>
             </a:pPr>
             <a:r>
               <a:rPr b="0" lang="en-US" sz="2000" strike="noStrike" u="none">
@@ -689,7 +691,7 @@
       </p:sp>
       <p:sp>
         <p:nvSpPr>
-          <p:cNvPr id="248" name="PlaceHolder 3"/>
+          <p:cNvPr id="249" name="PlaceHolder 3"/>
           <p:cNvSpPr>
             <a:spLocks noGrp="1"/>
           </p:cNvSpPr>
@@ -700,7 +702,7 @@
         <p:spPr>
           <a:xfrm>
             <a:off x="3884760" y="8685360"/>
-            <a:ext cx="2971440" cy="458280"/>
+            <a:ext cx="2971080" cy="457920"/>
           </a:xfrm>
           <a:prstGeom prst="rect">
             <a:avLst/>
@@ -720,6 +722,9 @@
                 <a:spcPct val="100000"/>
               </a:lnSpc>
               <a:buNone/>
+              <a:tabLst>
+                <a:tab algn="l" pos="0"/>
+              </a:tabLst>
               <a:defRPr b="0" lang="en-US" sz="1200" strike="noStrike" u="none">
                 <a:solidFill>
                   <a:schemeClr val="dk1"/>
@@ -737,8 +742,11 @@
                 <a:spcPct val="100000"/>
               </a:lnSpc>
               <a:buNone/>
-            </a:pPr>
-            <a:fld id="{9A7457E1-8E41-4319-83EB-ECB9A5E9D23B}" type="slidenum">
+              <a:tabLst>
+                <a:tab algn="l" pos="0"/>
+              </a:tabLst>
+            </a:pPr>
+            <a:fld id="{C82C8B57-3B08-4BB9-A046-E8C8826664A8}" type="slidenum">
               <a:rPr b="0" lang="en-US" sz="1200" strike="noStrike" u="none">
                 <a:solidFill>
                   <a:schemeClr val="dk1"/>
@@ -785,7 +793,7 @@
       </p:grpSpPr>
       <p:sp>
         <p:nvSpPr>
-          <p:cNvPr id="249" name="PlaceHolder 1"/>
+          <p:cNvPr id="250" name="PlaceHolder 1"/>
           <p:cNvSpPr>
             <a:spLocks noGrp="1"/>
           </p:cNvSpPr>
@@ -796,19 +804,19 @@
         <p:spPr>
           <a:xfrm>
             <a:off x="685800" y="1143000"/>
-            <a:ext cx="5486040" cy="3085920"/>
-          </a:xfrm>
-          <a:prstGeom prst="rect">
-            <a:avLst/>
-          </a:prstGeom>
-          <a:ln w="0">
-            <a:noFill/>
-          </a:ln>
-        </p:spPr>
-      </p:sp>
-      <p:sp>
-        <p:nvSpPr>
-          <p:cNvPr id="250" name="PlaceHolder 2"/>
+            <a:ext cx="5485680" cy="3085560"/>
+          </a:xfrm>
+          <a:prstGeom prst="rect">
+            <a:avLst/>
+          </a:prstGeom>
+          <a:ln w="0">
+            <a:noFill/>
+          </a:ln>
+        </p:spPr>
+      </p:sp>
+      <p:sp>
+        <p:nvSpPr>
+          <p:cNvPr id="251" name="PlaceHolder 2"/>
           <p:cNvSpPr>
             <a:spLocks noGrp="1"/>
           </p:cNvSpPr>
@@ -819,7 +827,7 @@
         <p:spPr>
           <a:xfrm>
             <a:off x="685800" y="4400640"/>
-            <a:ext cx="5486040" cy="3600000"/>
+            <a:ext cx="5485680" cy="3599640"/>
           </a:xfrm>
           <a:prstGeom prst="rect">
             <a:avLst/>
@@ -839,6 +847,9 @@
                 <a:spcPct val="100000"/>
               </a:lnSpc>
               <a:buNone/>
+              <a:tabLst>
+                <a:tab algn="l" pos="0"/>
+              </a:tabLst>
             </a:pPr>
             <a:r>
               <a:rPr b="0" lang="en-US" sz="2000" strike="noStrike" u="none">
@@ -864,7 +875,7 @@
       </p:sp>
       <p:sp>
         <p:nvSpPr>
-          <p:cNvPr id="251" name="PlaceHolder 3"/>
+          <p:cNvPr id="252" name="PlaceHolder 3"/>
           <p:cNvSpPr>
             <a:spLocks noGrp="1"/>
           </p:cNvSpPr>
@@ -875,7 +886,7 @@
         <p:spPr>
           <a:xfrm>
             <a:off x="3884760" y="8685360"/>
-            <a:ext cx="2971440" cy="458280"/>
+            <a:ext cx="2971080" cy="457920"/>
           </a:xfrm>
           <a:prstGeom prst="rect">
             <a:avLst/>
@@ -895,6 +906,9 @@
                 <a:spcPct val="100000"/>
               </a:lnSpc>
               <a:buNone/>
+              <a:tabLst>
+                <a:tab algn="l" pos="0"/>
+              </a:tabLst>
               <a:defRPr b="0" lang="en-US" sz="1200" strike="noStrike" u="none">
                 <a:solidFill>
                   <a:schemeClr val="dk1"/>
@@ -912,8 +926,11 @@
                 <a:spcPct val="100000"/>
               </a:lnSpc>
               <a:buNone/>
-            </a:pPr>
-            <a:fld id="{5F555723-1B65-44DB-9AA8-2576A6399C59}" type="slidenum">
+              <a:tabLst>
+                <a:tab algn="l" pos="0"/>
+              </a:tabLst>
+            </a:pPr>
+            <a:fld id="{5C31B27D-894E-4DA4-B717-D5BC3BD44B9E}" type="slidenum">
               <a:rPr b="0" lang="en-US" sz="1200" strike="noStrike" u="none">
                 <a:solidFill>
                   <a:schemeClr val="dk1"/>
@@ -960,7 +977,7 @@
       </p:grpSpPr>
       <p:sp>
         <p:nvSpPr>
-          <p:cNvPr id="252" name="PlaceHolder 1"/>
+          <p:cNvPr id="253" name="PlaceHolder 1"/>
           <p:cNvSpPr>
             <a:spLocks noGrp="1"/>
           </p:cNvSpPr>
@@ -971,19 +988,19 @@
         <p:spPr>
           <a:xfrm>
             <a:off x="685800" y="1143000"/>
-            <a:ext cx="5486040" cy="3085920"/>
-          </a:xfrm>
-          <a:prstGeom prst="rect">
-            <a:avLst/>
-          </a:prstGeom>
-          <a:ln w="0">
-            <a:noFill/>
-          </a:ln>
-        </p:spPr>
-      </p:sp>
-      <p:sp>
-        <p:nvSpPr>
-          <p:cNvPr id="253" name="PlaceHolder 2"/>
+            <a:ext cx="5485680" cy="3085560"/>
+          </a:xfrm>
+          <a:prstGeom prst="rect">
+            <a:avLst/>
+          </a:prstGeom>
+          <a:ln w="0">
+            <a:noFill/>
+          </a:ln>
+        </p:spPr>
+      </p:sp>
+      <p:sp>
+        <p:nvSpPr>
+          <p:cNvPr id="254" name="PlaceHolder 2"/>
           <p:cNvSpPr>
             <a:spLocks noGrp="1"/>
           </p:cNvSpPr>
@@ -994,7 +1011,7 @@
         <p:spPr>
           <a:xfrm>
             <a:off x="685800" y="4400640"/>
-            <a:ext cx="5486040" cy="3600000"/>
+            <a:ext cx="5485680" cy="3599640"/>
           </a:xfrm>
           <a:prstGeom prst="rect">
             <a:avLst/>
@@ -1014,6 +1031,9 @@
                 <a:spcPct val="100000"/>
               </a:lnSpc>
               <a:buNone/>
+              <a:tabLst>
+                <a:tab algn="l" pos="0"/>
+              </a:tabLst>
             </a:pPr>
             <a:r>
               <a:rPr b="0" lang="en-US" sz="2000" strike="noStrike" u="none">
@@ -1039,7 +1059,7 @@
       </p:sp>
       <p:sp>
         <p:nvSpPr>
-          <p:cNvPr id="254" name="PlaceHolder 3"/>
+          <p:cNvPr id="255" name="PlaceHolder 3"/>
           <p:cNvSpPr>
             <a:spLocks noGrp="1"/>
           </p:cNvSpPr>
@@ -1050,7 +1070,7 @@
         <p:spPr>
           <a:xfrm>
             <a:off x="3884760" y="8685360"/>
-            <a:ext cx="2971440" cy="458280"/>
+            <a:ext cx="2971080" cy="457920"/>
           </a:xfrm>
           <a:prstGeom prst="rect">
             <a:avLst/>
@@ -1070,6 +1090,9 @@
                 <a:spcPct val="100000"/>
               </a:lnSpc>
               <a:buNone/>
+              <a:tabLst>
+                <a:tab algn="l" pos="0"/>
+              </a:tabLst>
               <a:defRPr b="0" lang="en-US" sz="1200" strike="noStrike" u="none">
                 <a:solidFill>
                   <a:schemeClr val="dk1"/>
@@ -1087,8 +1110,11 @@
                 <a:spcPct val="100000"/>
               </a:lnSpc>
               <a:buNone/>
-            </a:pPr>
-            <a:fld id="{2AAD604D-EB7C-42C1-86F0-B4A9C007D3C0}" type="slidenum">
+              <a:tabLst>
+                <a:tab algn="l" pos="0"/>
+              </a:tabLst>
+            </a:pPr>
+            <a:fld id="{D3C9D0B9-D0A0-46B3-8141-13DBA1DC3B59}" type="slidenum">
               <a:rPr b="0" lang="en-US" sz="1200" strike="noStrike" u="none">
                 <a:solidFill>
                   <a:schemeClr val="dk1"/>
@@ -1135,7 +1161,7 @@
       </p:grpSpPr>
       <p:sp>
         <p:nvSpPr>
-          <p:cNvPr id="255" name="PlaceHolder 1"/>
+          <p:cNvPr id="256" name="PlaceHolder 1"/>
           <p:cNvSpPr>
             <a:spLocks noGrp="1"/>
           </p:cNvSpPr>
@@ -1146,19 +1172,19 @@
         <p:spPr>
           <a:xfrm>
             <a:off x="685800" y="1143000"/>
-            <a:ext cx="5486040" cy="3085920"/>
-          </a:xfrm>
-          <a:prstGeom prst="rect">
-            <a:avLst/>
-          </a:prstGeom>
-          <a:ln w="0">
-            <a:noFill/>
-          </a:ln>
-        </p:spPr>
-      </p:sp>
-      <p:sp>
-        <p:nvSpPr>
-          <p:cNvPr id="256" name="PlaceHolder 2"/>
+            <a:ext cx="5485680" cy="3085560"/>
+          </a:xfrm>
+          <a:prstGeom prst="rect">
+            <a:avLst/>
+          </a:prstGeom>
+          <a:ln w="0">
+            <a:noFill/>
+          </a:ln>
+        </p:spPr>
+      </p:sp>
+      <p:sp>
+        <p:nvSpPr>
+          <p:cNvPr id="257" name="PlaceHolder 2"/>
           <p:cNvSpPr>
             <a:spLocks noGrp="1"/>
           </p:cNvSpPr>
@@ -1169,7 +1195,7 @@
         <p:spPr>
           <a:xfrm>
             <a:off x="685800" y="4400640"/>
-            <a:ext cx="5486040" cy="3600000"/>
+            <a:ext cx="5485680" cy="3599640"/>
           </a:xfrm>
           <a:prstGeom prst="rect">
             <a:avLst/>
@@ -1189,6 +1215,9 @@
                 <a:spcPct val="100000"/>
               </a:lnSpc>
               <a:buNone/>
+              <a:tabLst>
+                <a:tab algn="l" pos="0"/>
+              </a:tabLst>
             </a:pPr>
             <a:r>
               <a:rPr b="0" lang="en-US" sz="2000" strike="noStrike" u="none">
@@ -1214,7 +1243,7 @@
       </p:sp>
       <p:sp>
         <p:nvSpPr>
-          <p:cNvPr id="257" name="PlaceHolder 3"/>
+          <p:cNvPr id="258" name="PlaceHolder 3"/>
           <p:cNvSpPr>
             <a:spLocks noGrp="1"/>
           </p:cNvSpPr>
@@ -1225,7 +1254,7 @@
         <p:spPr>
           <a:xfrm>
             <a:off x="3884760" y="8685360"/>
-            <a:ext cx="2971440" cy="458280"/>
+            <a:ext cx="2971080" cy="457920"/>
           </a:xfrm>
           <a:prstGeom prst="rect">
             <a:avLst/>
@@ -1245,6 +1274,9 @@
                 <a:spcPct val="100000"/>
               </a:lnSpc>
               <a:buNone/>
+              <a:tabLst>
+                <a:tab algn="l" pos="0"/>
+              </a:tabLst>
               <a:defRPr b="0" lang="en-US" sz="1200" strike="noStrike" u="none">
                 <a:solidFill>
                   <a:schemeClr val="dk1"/>
@@ -1262,8 +1294,11 @@
                 <a:spcPct val="100000"/>
               </a:lnSpc>
               <a:buNone/>
-            </a:pPr>
-            <a:fld id="{9C0BF705-895B-41FD-A3F2-C845D1CCA649}" type="slidenum">
+              <a:tabLst>
+                <a:tab algn="l" pos="0"/>
+              </a:tabLst>
+            </a:pPr>
+            <a:fld id="{ABF085DB-C010-4F64-8F00-03F5E3689C9E}" type="slidenum">
               <a:rPr b="0" lang="en-US" sz="1200" strike="noStrike" u="none">
                 <a:solidFill>
                   <a:schemeClr val="dk1"/>
@@ -1310,7 +1345,7 @@
       </p:grpSpPr>
       <p:sp>
         <p:nvSpPr>
-          <p:cNvPr id="258" name="PlaceHolder 1"/>
+          <p:cNvPr id="259" name="PlaceHolder 1"/>
           <p:cNvSpPr>
             <a:spLocks noGrp="1"/>
           </p:cNvSpPr>
@@ -1321,19 +1356,19 @@
         <p:spPr>
           <a:xfrm>
             <a:off x="685800" y="1143000"/>
-            <a:ext cx="5486040" cy="3085920"/>
-          </a:xfrm>
-          <a:prstGeom prst="rect">
-            <a:avLst/>
-          </a:prstGeom>
-          <a:ln w="0">
-            <a:noFill/>
-          </a:ln>
-        </p:spPr>
-      </p:sp>
-      <p:sp>
-        <p:nvSpPr>
-          <p:cNvPr id="259" name="PlaceHolder 2"/>
+            <a:ext cx="5485680" cy="3085560"/>
+          </a:xfrm>
+          <a:prstGeom prst="rect">
+            <a:avLst/>
+          </a:prstGeom>
+          <a:ln w="0">
+            <a:noFill/>
+          </a:ln>
+        </p:spPr>
+      </p:sp>
+      <p:sp>
+        <p:nvSpPr>
+          <p:cNvPr id="260" name="PlaceHolder 2"/>
           <p:cNvSpPr>
             <a:spLocks noGrp="1"/>
           </p:cNvSpPr>
@@ -1344,7 +1379,7 @@
         <p:spPr>
           <a:xfrm>
             <a:off x="685800" y="4400640"/>
-            <a:ext cx="5486040" cy="3600000"/>
+            <a:ext cx="5485680" cy="3599640"/>
           </a:xfrm>
           <a:prstGeom prst="rect">
             <a:avLst/>
@@ -1364,6 +1399,9 @@
                 <a:spcPct val="100000"/>
               </a:lnSpc>
               <a:buNone/>
+              <a:tabLst>
+                <a:tab algn="l" pos="0"/>
+              </a:tabLst>
             </a:pPr>
             <a:r>
               <a:rPr b="0" lang="en-US" sz="2000" strike="noStrike" u="none">
@@ -1389,7 +1427,7 @@
       </p:sp>
       <p:sp>
         <p:nvSpPr>
-          <p:cNvPr id="260" name="PlaceHolder 3"/>
+          <p:cNvPr id="261" name="PlaceHolder 3"/>
           <p:cNvSpPr>
             <a:spLocks noGrp="1"/>
           </p:cNvSpPr>
@@ -1400,7 +1438,7 @@
         <p:spPr>
           <a:xfrm>
             <a:off x="3884760" y="8685360"/>
-            <a:ext cx="2971440" cy="458280"/>
+            <a:ext cx="2971080" cy="457920"/>
           </a:xfrm>
           <a:prstGeom prst="rect">
             <a:avLst/>
@@ -1420,6 +1458,9 @@
                 <a:spcPct val="100000"/>
               </a:lnSpc>
               <a:buNone/>
+              <a:tabLst>
+                <a:tab algn="l" pos="0"/>
+              </a:tabLst>
               <a:defRPr b="0" lang="en-US" sz="1200" strike="noStrike" u="none">
                 <a:solidFill>
                   <a:schemeClr val="dk1"/>
@@ -1437,8 +1478,11 @@
                 <a:spcPct val="100000"/>
               </a:lnSpc>
               <a:buNone/>
-            </a:pPr>
-            <a:fld id="{A6B09AE0-F566-4557-A29D-0A3F498D0134}" type="slidenum">
+              <a:tabLst>
+                <a:tab algn="l" pos="0"/>
+              </a:tabLst>
+            </a:pPr>
+            <a:fld id="{FD884380-575C-4C69-B905-9219F369C590}" type="slidenum">
               <a:rPr b="0" lang="en-US" sz="1200" strike="noStrike" u="none">
                 <a:solidFill>
                   <a:schemeClr val="dk1"/>
@@ -1485,7 +1529,7 @@
       </p:grpSpPr>
       <p:sp>
         <p:nvSpPr>
-          <p:cNvPr id="222" name="PlaceHolder 1"/>
+          <p:cNvPr id="223" name="PlaceHolder 1"/>
           <p:cNvSpPr>
             <a:spLocks noGrp="1"/>
           </p:cNvSpPr>
@@ -1496,19 +1540,19 @@
         <p:spPr>
           <a:xfrm>
             <a:off x="685800" y="1143000"/>
-            <a:ext cx="5486040" cy="3085920"/>
-          </a:xfrm>
-          <a:prstGeom prst="rect">
-            <a:avLst/>
-          </a:prstGeom>
-          <a:ln w="0">
-            <a:noFill/>
-          </a:ln>
-        </p:spPr>
-      </p:sp>
-      <p:sp>
-        <p:nvSpPr>
-          <p:cNvPr id="223" name="PlaceHolder 2"/>
+            <a:ext cx="5485680" cy="3085560"/>
+          </a:xfrm>
+          <a:prstGeom prst="rect">
+            <a:avLst/>
+          </a:prstGeom>
+          <a:ln w="0">
+            <a:noFill/>
+          </a:ln>
+        </p:spPr>
+      </p:sp>
+      <p:sp>
+        <p:nvSpPr>
+          <p:cNvPr id="224" name="PlaceHolder 2"/>
           <p:cNvSpPr>
             <a:spLocks noGrp="1"/>
           </p:cNvSpPr>
@@ -1519,7 +1563,7 @@
         <p:spPr>
           <a:xfrm>
             <a:off x="685800" y="4400640"/>
-            <a:ext cx="5486040" cy="3600000"/>
+            <a:ext cx="5485680" cy="3599640"/>
           </a:xfrm>
           <a:prstGeom prst="rect">
             <a:avLst/>
@@ -1539,6 +1583,9 @@
                 <a:spcPct val="100000"/>
               </a:lnSpc>
               <a:buNone/>
+              <a:tabLst>
+                <a:tab algn="l" pos="0"/>
+              </a:tabLst>
             </a:pPr>
             <a:r>
               <a:rPr b="0" lang="en-US" sz="2000" strike="noStrike" u="none">
@@ -1564,7 +1611,7 @@
       </p:sp>
       <p:sp>
         <p:nvSpPr>
-          <p:cNvPr id="224" name="PlaceHolder 3"/>
+          <p:cNvPr id="225" name="PlaceHolder 3"/>
           <p:cNvSpPr>
             <a:spLocks noGrp="1"/>
           </p:cNvSpPr>
@@ -1575,7 +1622,7 @@
         <p:spPr>
           <a:xfrm>
             <a:off x="3884760" y="8685360"/>
-            <a:ext cx="2971440" cy="458280"/>
+            <a:ext cx="2971080" cy="457920"/>
           </a:xfrm>
           <a:prstGeom prst="rect">
             <a:avLst/>
@@ -1595,6 +1642,9 @@
                 <a:spcPct val="100000"/>
               </a:lnSpc>
               <a:buNone/>
+              <a:tabLst>
+                <a:tab algn="l" pos="0"/>
+              </a:tabLst>
               <a:defRPr b="0" lang="en-US" sz="1200" strike="noStrike" u="none">
                 <a:solidFill>
                   <a:schemeClr val="dk1"/>
@@ -1612,8 +1662,11 @@
                 <a:spcPct val="100000"/>
               </a:lnSpc>
               <a:buNone/>
-            </a:pPr>
-            <a:fld id="{715AF042-45CD-4BAE-8149-B2D772BBE923}" type="slidenum">
+              <a:tabLst>
+                <a:tab algn="l" pos="0"/>
+              </a:tabLst>
+            </a:pPr>
+            <a:fld id="{8EF13039-39AC-4DCB-96F1-ED75E25AEFDF}" type="slidenum">
               <a:rPr b="0" lang="en-US" sz="1200" strike="noStrike" u="none">
                 <a:solidFill>
                   <a:schemeClr val="dk1"/>
@@ -1660,7 +1713,7 @@
       </p:grpSpPr>
       <p:sp>
         <p:nvSpPr>
-          <p:cNvPr id="225" name="PlaceHolder 1"/>
+          <p:cNvPr id="226" name="PlaceHolder 1"/>
           <p:cNvSpPr>
             <a:spLocks noGrp="1"/>
           </p:cNvSpPr>
@@ -1671,19 +1724,19 @@
         <p:spPr>
           <a:xfrm>
             <a:off x="685800" y="1143000"/>
-            <a:ext cx="5486040" cy="3085920"/>
-          </a:xfrm>
-          <a:prstGeom prst="rect">
-            <a:avLst/>
-          </a:prstGeom>
-          <a:ln w="0">
-            <a:noFill/>
-          </a:ln>
-        </p:spPr>
-      </p:sp>
-      <p:sp>
-        <p:nvSpPr>
-          <p:cNvPr id="226" name="PlaceHolder 2"/>
+            <a:ext cx="5485680" cy="3085560"/>
+          </a:xfrm>
+          <a:prstGeom prst="rect">
+            <a:avLst/>
+          </a:prstGeom>
+          <a:ln w="0">
+            <a:noFill/>
+          </a:ln>
+        </p:spPr>
+      </p:sp>
+      <p:sp>
+        <p:nvSpPr>
+          <p:cNvPr id="227" name="PlaceHolder 2"/>
           <p:cNvSpPr>
             <a:spLocks noGrp="1"/>
           </p:cNvSpPr>
@@ -1694,7 +1747,7 @@
         <p:spPr>
           <a:xfrm>
             <a:off x="685800" y="4400640"/>
-            <a:ext cx="5486040" cy="3600000"/>
+            <a:ext cx="5485680" cy="3599640"/>
           </a:xfrm>
           <a:prstGeom prst="rect">
             <a:avLst/>
@@ -1714,6 +1767,9 @@
                 <a:spcPct val="100000"/>
               </a:lnSpc>
               <a:buNone/>
+              <a:tabLst>
+                <a:tab algn="l" pos="0"/>
+              </a:tabLst>
             </a:pPr>
             <a:r>
               <a:rPr b="0" lang="en-US" sz="2000" strike="noStrike" u="none">
@@ -1739,7 +1795,7 @@
       </p:sp>
       <p:sp>
         <p:nvSpPr>
-          <p:cNvPr id="227" name="PlaceHolder 3"/>
+          <p:cNvPr id="228" name="PlaceHolder 3"/>
           <p:cNvSpPr>
             <a:spLocks noGrp="1"/>
           </p:cNvSpPr>
@@ -1750,7 +1806,7 @@
         <p:spPr>
           <a:xfrm>
             <a:off x="3884760" y="8685360"/>
-            <a:ext cx="2971440" cy="458280"/>
+            <a:ext cx="2971080" cy="457920"/>
           </a:xfrm>
           <a:prstGeom prst="rect">
             <a:avLst/>
@@ -1770,6 +1826,9 @@
                 <a:spcPct val="100000"/>
               </a:lnSpc>
               <a:buNone/>
+              <a:tabLst>
+                <a:tab algn="l" pos="0"/>
+              </a:tabLst>
               <a:defRPr b="0" lang="en-US" sz="1200" strike="noStrike" u="none">
                 <a:solidFill>
                   <a:schemeClr val="dk1"/>
@@ -1787,8 +1846,11 @@
                 <a:spcPct val="100000"/>
               </a:lnSpc>
               <a:buNone/>
-            </a:pPr>
-            <a:fld id="{0722A358-7A2C-42B3-BE83-938F44692676}" type="slidenum">
+              <a:tabLst>
+                <a:tab algn="l" pos="0"/>
+              </a:tabLst>
+            </a:pPr>
+            <a:fld id="{6FDB53BB-8EAA-4811-A181-1A6E9B22B2D5}" type="slidenum">
               <a:rPr b="0" lang="en-US" sz="1200" strike="noStrike" u="none">
                 <a:solidFill>
                   <a:schemeClr val="dk1"/>
@@ -1835,7 +1897,7 @@
       </p:grpSpPr>
       <p:sp>
         <p:nvSpPr>
-          <p:cNvPr id="228" name="PlaceHolder 1"/>
+          <p:cNvPr id="229" name="PlaceHolder 1"/>
           <p:cNvSpPr>
             <a:spLocks noGrp="1"/>
           </p:cNvSpPr>
@@ -1846,19 +1908,19 @@
         <p:spPr>
           <a:xfrm>
             <a:off x="685800" y="1143000"/>
-            <a:ext cx="5486040" cy="3085920"/>
-          </a:xfrm>
-          <a:prstGeom prst="rect">
-            <a:avLst/>
-          </a:prstGeom>
-          <a:ln w="0">
-            <a:noFill/>
-          </a:ln>
-        </p:spPr>
-      </p:sp>
-      <p:sp>
-        <p:nvSpPr>
-          <p:cNvPr id="229" name="PlaceHolder 2"/>
+            <a:ext cx="5485680" cy="3085560"/>
+          </a:xfrm>
+          <a:prstGeom prst="rect">
+            <a:avLst/>
+          </a:prstGeom>
+          <a:ln w="0">
+            <a:noFill/>
+          </a:ln>
+        </p:spPr>
+      </p:sp>
+      <p:sp>
+        <p:nvSpPr>
+          <p:cNvPr id="230" name="PlaceHolder 2"/>
           <p:cNvSpPr>
             <a:spLocks noGrp="1"/>
           </p:cNvSpPr>
@@ -1869,7 +1931,7 @@
         <p:spPr>
           <a:xfrm>
             <a:off x="685800" y="4400640"/>
-            <a:ext cx="5486040" cy="3600000"/>
+            <a:ext cx="5485680" cy="3599640"/>
           </a:xfrm>
           <a:prstGeom prst="rect">
             <a:avLst/>
@@ -1889,6 +1951,9 @@
                 <a:spcPct val="100000"/>
               </a:lnSpc>
               <a:buNone/>
+              <a:tabLst>
+                <a:tab algn="l" pos="0"/>
+              </a:tabLst>
             </a:pPr>
             <a:r>
               <a:rPr b="0" lang="en-US" sz="2000" strike="noStrike" u="none">
@@ -1914,7 +1979,7 @@
       </p:sp>
       <p:sp>
         <p:nvSpPr>
-          <p:cNvPr id="230" name="PlaceHolder 3"/>
+          <p:cNvPr id="231" name="PlaceHolder 3"/>
           <p:cNvSpPr>
             <a:spLocks noGrp="1"/>
           </p:cNvSpPr>
@@ -1925,7 +1990,7 @@
         <p:spPr>
           <a:xfrm>
             <a:off x="3884760" y="8685360"/>
-            <a:ext cx="2971440" cy="458280"/>
+            <a:ext cx="2971080" cy="457920"/>
           </a:xfrm>
           <a:prstGeom prst="rect">
             <a:avLst/>
@@ -1945,6 +2010,9 @@
                 <a:spcPct val="100000"/>
               </a:lnSpc>
               <a:buNone/>
+              <a:tabLst>
+                <a:tab algn="l" pos="0"/>
+              </a:tabLst>
               <a:defRPr b="0" lang="en-US" sz="1200" strike="noStrike" u="none">
                 <a:solidFill>
                   <a:schemeClr val="dk1"/>
@@ -1962,8 +2030,11 @@
                 <a:spcPct val="100000"/>
               </a:lnSpc>
               <a:buNone/>
-            </a:pPr>
-            <a:fld id="{5A15E494-C978-46A6-94C6-536AC47C788B}" type="slidenum">
+              <a:tabLst>
+                <a:tab algn="l" pos="0"/>
+              </a:tabLst>
+            </a:pPr>
+            <a:fld id="{DD2702F0-7BD2-484B-8599-A9E7E7BA2B51}" type="slidenum">
               <a:rPr b="0" lang="en-US" sz="1200" strike="noStrike" u="none">
                 <a:solidFill>
                   <a:schemeClr val="dk1"/>
@@ -2010,7 +2081,7 @@
       </p:grpSpPr>
       <p:sp>
         <p:nvSpPr>
-          <p:cNvPr id="231" name="PlaceHolder 1"/>
+          <p:cNvPr id="232" name="PlaceHolder 1"/>
           <p:cNvSpPr>
             <a:spLocks noGrp="1"/>
           </p:cNvSpPr>
@@ -2021,19 +2092,19 @@
         <p:spPr>
           <a:xfrm>
             <a:off x="685800" y="1143000"/>
-            <a:ext cx="5486040" cy="3085920"/>
-          </a:xfrm>
-          <a:prstGeom prst="rect">
-            <a:avLst/>
-          </a:prstGeom>
-          <a:ln w="0">
-            <a:noFill/>
-          </a:ln>
-        </p:spPr>
-      </p:sp>
-      <p:sp>
-        <p:nvSpPr>
-          <p:cNvPr id="232" name="PlaceHolder 2"/>
+            <a:ext cx="5485680" cy="3085560"/>
+          </a:xfrm>
+          <a:prstGeom prst="rect">
+            <a:avLst/>
+          </a:prstGeom>
+          <a:ln w="0">
+            <a:noFill/>
+          </a:ln>
+        </p:spPr>
+      </p:sp>
+      <p:sp>
+        <p:nvSpPr>
+          <p:cNvPr id="233" name="PlaceHolder 2"/>
           <p:cNvSpPr>
             <a:spLocks noGrp="1"/>
           </p:cNvSpPr>
@@ -2044,7 +2115,7 @@
         <p:spPr>
           <a:xfrm>
             <a:off x="685800" y="4400640"/>
-            <a:ext cx="5486040" cy="3600000"/>
+            <a:ext cx="5485680" cy="3599640"/>
           </a:xfrm>
           <a:prstGeom prst="rect">
             <a:avLst/>
@@ -2064,6 +2135,9 @@
                 <a:spcPct val="100000"/>
               </a:lnSpc>
               <a:buNone/>
+              <a:tabLst>
+                <a:tab algn="l" pos="0"/>
+              </a:tabLst>
             </a:pPr>
             <a:r>
               <a:rPr b="0" lang="en-US" sz="2000" strike="noStrike" u="none">
@@ -2089,7 +2163,7 @@
       </p:sp>
       <p:sp>
         <p:nvSpPr>
-          <p:cNvPr id="233" name="PlaceHolder 3"/>
+          <p:cNvPr id="234" name="PlaceHolder 3"/>
           <p:cNvSpPr>
             <a:spLocks noGrp="1"/>
           </p:cNvSpPr>
@@ -2100,7 +2174,7 @@
         <p:spPr>
           <a:xfrm>
             <a:off x="3884760" y="8685360"/>
-            <a:ext cx="2971440" cy="458280"/>
+            <a:ext cx="2971080" cy="457920"/>
           </a:xfrm>
           <a:prstGeom prst="rect">
             <a:avLst/>
@@ -2120,6 +2194,9 @@
                 <a:spcPct val="100000"/>
               </a:lnSpc>
               <a:buNone/>
+              <a:tabLst>
+                <a:tab algn="l" pos="0"/>
+              </a:tabLst>
               <a:defRPr b="0" lang="en-US" sz="1200" strike="noStrike" u="none">
                 <a:solidFill>
                   <a:schemeClr val="dk1"/>
@@ -2137,8 +2214,11 @@
                 <a:spcPct val="100000"/>
               </a:lnSpc>
               <a:buNone/>
-            </a:pPr>
-            <a:fld id="{4D537B6C-119F-4650-A754-6F8E041A6E87}" type="slidenum">
+              <a:tabLst>
+                <a:tab algn="l" pos="0"/>
+              </a:tabLst>
+            </a:pPr>
+            <a:fld id="{D879CF7A-D16B-4F50-92A5-7BA6948A1BF1}" type="slidenum">
               <a:rPr b="0" lang="en-US" sz="1200" strike="noStrike" u="none">
                 <a:solidFill>
                   <a:schemeClr val="dk1"/>
@@ -2185,7 +2265,7 @@
       </p:grpSpPr>
       <p:sp>
         <p:nvSpPr>
-          <p:cNvPr id="234" name="PlaceHolder 1"/>
+          <p:cNvPr id="235" name="PlaceHolder 1"/>
           <p:cNvSpPr>
             <a:spLocks noGrp="1"/>
           </p:cNvSpPr>
@@ -2196,19 +2276,19 @@
         <p:spPr>
           <a:xfrm>
             <a:off x="685800" y="1143000"/>
-            <a:ext cx="5486040" cy="3085920"/>
-          </a:xfrm>
-          <a:prstGeom prst="rect">
-            <a:avLst/>
-          </a:prstGeom>
-          <a:ln w="0">
-            <a:noFill/>
-          </a:ln>
-        </p:spPr>
-      </p:sp>
-      <p:sp>
-        <p:nvSpPr>
-          <p:cNvPr id="235" name="PlaceHolder 2"/>
+            <a:ext cx="5485680" cy="3085560"/>
+          </a:xfrm>
+          <a:prstGeom prst="rect">
+            <a:avLst/>
+          </a:prstGeom>
+          <a:ln w="0">
+            <a:noFill/>
+          </a:ln>
+        </p:spPr>
+      </p:sp>
+      <p:sp>
+        <p:nvSpPr>
+          <p:cNvPr id="236" name="PlaceHolder 2"/>
           <p:cNvSpPr>
             <a:spLocks noGrp="1"/>
           </p:cNvSpPr>
@@ -2219,7 +2299,7 @@
         <p:spPr>
           <a:xfrm>
             <a:off x="685800" y="4400640"/>
-            <a:ext cx="5486040" cy="3600000"/>
+            <a:ext cx="5485680" cy="3599640"/>
           </a:xfrm>
           <a:prstGeom prst="rect">
             <a:avLst/>
@@ -2239,6 +2319,9 @@
                 <a:spcPct val="100000"/>
               </a:lnSpc>
               <a:buNone/>
+              <a:tabLst>
+                <a:tab algn="l" pos="0"/>
+              </a:tabLst>
             </a:pPr>
             <a:r>
               <a:rPr b="0" lang="en-US" sz="2000" strike="noStrike" u="none">
@@ -2264,7 +2347,7 @@
       </p:sp>
       <p:sp>
         <p:nvSpPr>
-          <p:cNvPr id="236" name="PlaceHolder 3"/>
+          <p:cNvPr id="237" name="PlaceHolder 3"/>
           <p:cNvSpPr>
             <a:spLocks noGrp="1"/>
           </p:cNvSpPr>
@@ -2275,7 +2358,7 @@
         <p:spPr>
           <a:xfrm>
             <a:off x="3884760" y="8685360"/>
-            <a:ext cx="2971440" cy="458280"/>
+            <a:ext cx="2971080" cy="457920"/>
           </a:xfrm>
           <a:prstGeom prst="rect">
             <a:avLst/>
@@ -2295,6 +2378,9 @@
                 <a:spcPct val="100000"/>
               </a:lnSpc>
               <a:buNone/>
+              <a:tabLst>
+                <a:tab algn="l" pos="0"/>
+              </a:tabLst>
               <a:defRPr b="0" lang="en-US" sz="1200" strike="noStrike" u="none">
                 <a:solidFill>
                   <a:schemeClr val="dk1"/>
@@ -2312,8 +2398,11 @@
                 <a:spcPct val="100000"/>
               </a:lnSpc>
               <a:buNone/>
-            </a:pPr>
-            <a:fld id="{A76BCA17-5D1F-4664-A3EB-335399108662}" type="slidenum">
+              <a:tabLst>
+                <a:tab algn="l" pos="0"/>
+              </a:tabLst>
+            </a:pPr>
+            <a:fld id="{F2E8DB42-374F-4849-850F-E622D3118F03}" type="slidenum">
               <a:rPr b="0" lang="en-US" sz="1200" strike="noStrike" u="none">
                 <a:solidFill>
                   <a:schemeClr val="dk1"/>
@@ -2360,7 +2449,7 @@
       </p:grpSpPr>
       <p:sp>
         <p:nvSpPr>
-          <p:cNvPr id="237" name="PlaceHolder 1"/>
+          <p:cNvPr id="238" name="PlaceHolder 1"/>
           <p:cNvSpPr>
             <a:spLocks noGrp="1"/>
           </p:cNvSpPr>
@@ -2371,19 +2460,19 @@
         <p:spPr>
           <a:xfrm>
             <a:off x="685800" y="1143000"/>
-            <a:ext cx="5486040" cy="3085920"/>
-          </a:xfrm>
-          <a:prstGeom prst="rect">
-            <a:avLst/>
-          </a:prstGeom>
-          <a:ln w="0">
-            <a:noFill/>
-          </a:ln>
-        </p:spPr>
-      </p:sp>
-      <p:sp>
-        <p:nvSpPr>
-          <p:cNvPr id="238" name="PlaceHolder 2"/>
+            <a:ext cx="5485680" cy="3085560"/>
+          </a:xfrm>
+          <a:prstGeom prst="rect">
+            <a:avLst/>
+          </a:prstGeom>
+          <a:ln w="0">
+            <a:noFill/>
+          </a:ln>
+        </p:spPr>
+      </p:sp>
+      <p:sp>
+        <p:nvSpPr>
+          <p:cNvPr id="239" name="PlaceHolder 2"/>
           <p:cNvSpPr>
             <a:spLocks noGrp="1"/>
           </p:cNvSpPr>
@@ -2394,7 +2483,7 @@
         <p:spPr>
           <a:xfrm>
             <a:off x="685800" y="4400640"/>
-            <a:ext cx="5486040" cy="3600000"/>
+            <a:ext cx="5485680" cy="3599640"/>
           </a:xfrm>
           <a:prstGeom prst="rect">
             <a:avLst/>
@@ -2414,6 +2503,9 @@
                 <a:spcPct val="100000"/>
               </a:lnSpc>
               <a:buNone/>
+              <a:tabLst>
+                <a:tab algn="l" pos="0"/>
+              </a:tabLst>
             </a:pPr>
             <a:r>
               <a:rPr b="0" lang="en-US" sz="2000" strike="noStrike" u="none">
@@ -2439,7 +2531,7 @@
       </p:sp>
       <p:sp>
         <p:nvSpPr>
-          <p:cNvPr id="239" name="PlaceHolder 3"/>
+          <p:cNvPr id="240" name="PlaceHolder 3"/>
           <p:cNvSpPr>
             <a:spLocks noGrp="1"/>
           </p:cNvSpPr>
@@ -2450,7 +2542,7 @@
         <p:spPr>
           <a:xfrm>
             <a:off x="3884760" y="8685360"/>
-            <a:ext cx="2971440" cy="458280"/>
+            <a:ext cx="2971080" cy="457920"/>
           </a:xfrm>
           <a:prstGeom prst="rect">
             <a:avLst/>
@@ -2470,6 +2562,9 @@
                 <a:spcPct val="100000"/>
               </a:lnSpc>
               <a:buNone/>
+              <a:tabLst>
+                <a:tab algn="l" pos="0"/>
+              </a:tabLst>
               <a:defRPr b="0" lang="en-US" sz="1200" strike="noStrike" u="none">
                 <a:solidFill>
                   <a:schemeClr val="dk1"/>
@@ -2487,8 +2582,11 @@
                 <a:spcPct val="100000"/>
               </a:lnSpc>
               <a:buNone/>
-            </a:pPr>
-            <a:fld id="{EBA001EC-BAC7-4B9B-84D6-BFAD4946293F}" type="slidenum">
+              <a:tabLst>
+                <a:tab algn="l" pos="0"/>
+              </a:tabLst>
+            </a:pPr>
+            <a:fld id="{7D42CC20-091A-4676-8225-72F5066D86CF}" type="slidenum">
               <a:rPr b="0" lang="en-US" sz="1200" strike="noStrike" u="none">
                 <a:solidFill>
                   <a:schemeClr val="dk1"/>
@@ -2535,7 +2633,7 @@
       </p:grpSpPr>
       <p:sp>
         <p:nvSpPr>
-          <p:cNvPr id="240" name="PlaceHolder 1"/>
+          <p:cNvPr id="241" name="PlaceHolder 1"/>
           <p:cNvSpPr>
             <a:spLocks noGrp="1"/>
           </p:cNvSpPr>
@@ -2546,19 +2644,19 @@
         <p:spPr>
           <a:xfrm>
             <a:off x="685800" y="1143000"/>
-            <a:ext cx="5486040" cy="3085920"/>
-          </a:xfrm>
-          <a:prstGeom prst="rect">
-            <a:avLst/>
-          </a:prstGeom>
-          <a:ln w="0">
-            <a:noFill/>
-          </a:ln>
-        </p:spPr>
-      </p:sp>
-      <p:sp>
-        <p:nvSpPr>
-          <p:cNvPr id="241" name="PlaceHolder 2"/>
+            <a:ext cx="5485680" cy="3085560"/>
+          </a:xfrm>
+          <a:prstGeom prst="rect">
+            <a:avLst/>
+          </a:prstGeom>
+          <a:ln w="0">
+            <a:noFill/>
+          </a:ln>
+        </p:spPr>
+      </p:sp>
+      <p:sp>
+        <p:nvSpPr>
+          <p:cNvPr id="242" name="PlaceHolder 2"/>
           <p:cNvSpPr>
             <a:spLocks noGrp="1"/>
           </p:cNvSpPr>
@@ -2569,7 +2667,7 @@
         <p:spPr>
           <a:xfrm>
             <a:off x="685800" y="4400640"/>
-            <a:ext cx="5486040" cy="3600000"/>
+            <a:ext cx="5485680" cy="3599640"/>
           </a:xfrm>
           <a:prstGeom prst="rect">
             <a:avLst/>
@@ -2589,6 +2687,9 @@
                 <a:spcPct val="100000"/>
               </a:lnSpc>
               <a:buNone/>
+              <a:tabLst>
+                <a:tab algn="l" pos="0"/>
+              </a:tabLst>
             </a:pPr>
             <a:r>
               <a:rPr b="0" lang="en-US" sz="2000" strike="noStrike" u="none">
@@ -2614,7 +2715,7 @@
       </p:sp>
       <p:sp>
         <p:nvSpPr>
-          <p:cNvPr id="242" name="PlaceHolder 3"/>
+          <p:cNvPr id="243" name="PlaceHolder 3"/>
           <p:cNvSpPr>
             <a:spLocks noGrp="1"/>
           </p:cNvSpPr>
@@ -2625,7 +2726,7 @@
         <p:spPr>
           <a:xfrm>
             <a:off x="3884760" y="8685360"/>
-            <a:ext cx="2971440" cy="458280"/>
+            <a:ext cx="2971080" cy="457920"/>
           </a:xfrm>
           <a:prstGeom prst="rect">
             <a:avLst/>
@@ -2645,6 +2746,9 @@
                 <a:spcPct val="100000"/>
               </a:lnSpc>
               <a:buNone/>
+              <a:tabLst>
+                <a:tab algn="l" pos="0"/>
+              </a:tabLst>
               <a:defRPr b="0" lang="en-US" sz="1200" strike="noStrike" u="none">
                 <a:solidFill>
                   <a:schemeClr val="dk1"/>
@@ -2662,8 +2766,11 @@
                 <a:spcPct val="100000"/>
               </a:lnSpc>
               <a:buNone/>
-            </a:pPr>
-            <a:fld id="{622CD32C-95E6-43CA-B2A7-A26F46A9E324}" type="slidenum">
+              <a:tabLst>
+                <a:tab algn="l" pos="0"/>
+              </a:tabLst>
+            </a:pPr>
+            <a:fld id="{60669162-FB9B-4096-BF8A-93B5FF0B040B}" type="slidenum">
               <a:rPr b="0" lang="en-US" sz="1200" strike="noStrike" u="none">
                 <a:solidFill>
                   <a:schemeClr val="dk1"/>
@@ -2710,7 +2817,7 @@
       </p:grpSpPr>
       <p:sp>
         <p:nvSpPr>
-          <p:cNvPr id="243" name="PlaceHolder 1"/>
+          <p:cNvPr id="244" name="PlaceHolder 1"/>
           <p:cNvSpPr>
             <a:spLocks noGrp="1"/>
           </p:cNvSpPr>
@@ -2721,19 +2828,19 @@
         <p:spPr>
           <a:xfrm>
             <a:off x="685800" y="1143000"/>
-            <a:ext cx="5486040" cy="3085920"/>
-          </a:xfrm>
-          <a:prstGeom prst="rect">
-            <a:avLst/>
-          </a:prstGeom>
-          <a:ln w="0">
-            <a:noFill/>
-          </a:ln>
-        </p:spPr>
-      </p:sp>
-      <p:sp>
-        <p:nvSpPr>
-          <p:cNvPr id="244" name="PlaceHolder 2"/>
+            <a:ext cx="5485680" cy="3085560"/>
+          </a:xfrm>
+          <a:prstGeom prst="rect">
+            <a:avLst/>
+          </a:prstGeom>
+          <a:ln w="0">
+            <a:noFill/>
+          </a:ln>
+        </p:spPr>
+      </p:sp>
+      <p:sp>
+        <p:nvSpPr>
+          <p:cNvPr id="245" name="PlaceHolder 2"/>
           <p:cNvSpPr>
             <a:spLocks noGrp="1"/>
           </p:cNvSpPr>
@@ -2744,7 +2851,7 @@
         <p:spPr>
           <a:xfrm>
             <a:off x="685800" y="4400640"/>
-            <a:ext cx="5486040" cy="3600000"/>
+            <a:ext cx="5485680" cy="3599640"/>
           </a:xfrm>
           <a:prstGeom prst="rect">
             <a:avLst/>
@@ -2764,6 +2871,9 @@
                 <a:spcPct val="100000"/>
               </a:lnSpc>
               <a:buNone/>
+              <a:tabLst>
+                <a:tab algn="l" pos="0"/>
+              </a:tabLst>
             </a:pPr>
             <a:r>
               <a:rPr b="0" lang="en-US" sz="2000" strike="noStrike" u="none">
@@ -2789,7 +2899,7 @@
       </p:sp>
       <p:sp>
         <p:nvSpPr>
-          <p:cNvPr id="245" name="PlaceHolder 3"/>
+          <p:cNvPr id="246" name="PlaceHolder 3"/>
           <p:cNvSpPr>
             <a:spLocks noGrp="1"/>
           </p:cNvSpPr>
@@ -2800,7 +2910,7 @@
         <p:spPr>
           <a:xfrm>
             <a:off x="3884760" y="8685360"/>
-            <a:ext cx="2971440" cy="458280"/>
+            <a:ext cx="2971080" cy="457920"/>
           </a:xfrm>
           <a:prstGeom prst="rect">
             <a:avLst/>
@@ -2820,6 +2930,9 @@
                 <a:spcPct val="100000"/>
               </a:lnSpc>
               <a:buNone/>
+              <a:tabLst>
+                <a:tab algn="l" pos="0"/>
+              </a:tabLst>
               <a:defRPr b="0" lang="en-US" sz="1200" strike="noStrike" u="none">
                 <a:solidFill>
                   <a:schemeClr val="dk1"/>
@@ -2837,8 +2950,11 @@
                 <a:spcPct val="100000"/>
               </a:lnSpc>
               <a:buNone/>
-            </a:pPr>
-            <a:fld id="{67C7AD22-8AAB-43C9-927E-CDC5C391DC1C}" type="slidenum">
+              <a:tabLst>
+                <a:tab algn="l" pos="0"/>
+              </a:tabLst>
+            </a:pPr>
+            <a:fld id="{AE7B2506-FE27-47D3-BF02-78132923FDE4}" type="slidenum">
               <a:rPr b="0" lang="en-US" sz="1200" strike="noStrike" u="none">
                 <a:solidFill>
                   <a:schemeClr val="dk1"/>
@@ -2940,27 +3056,49 @@
             <a:noAutofit/>
           </a:bodyPr>
           <a:p>
-            <a:pPr indent="0">
+            <a:pPr indent="0" algn="ctr">
               <a:buNone/>
             </a:pPr>
             <a:r>
-              <a:rPr b="0" lang="en-US" sz="1800" strike="noStrike" u="none">
-                <a:solidFill>
-                  <a:schemeClr val="dk1"/>
-                </a:solidFill>
-                <a:effectLst/>
-                <a:uFillTx/>
-                <a:latin typeface="Calibri"/>
-              </a:rPr>
-              <a:t>Click to edit the title text format</a:t>
-            </a:r>
-            <a:endParaRPr b="0" lang="en-US" sz="1800" strike="noStrike" u="none">
-              <a:solidFill>
-                <a:schemeClr val="dk1"/>
-              </a:solidFill>
-              <a:effectLst/>
-              <a:uFillTx/>
-              <a:latin typeface="Calibri"/>
+              <a:rPr b="0" lang="en-US" sz="4400" strike="noStrike" u="none">
+                <a:solidFill>
+                  <a:srgbClr val="000000"/>
+                </a:solidFill>
+                <a:effectLst/>
+                <a:uFillTx/>
+                <a:latin typeface="Arial"/>
+              </a:rPr>
+              <a:t>Click to edit </a:t>
+            </a:r>
+            <a:r>
+              <a:rPr b="0" lang="en-US" sz="4400" strike="noStrike" u="none">
+                <a:solidFill>
+                  <a:srgbClr val="000000"/>
+                </a:solidFill>
+                <a:effectLst/>
+                <a:uFillTx/>
+                <a:latin typeface="Arial"/>
+              </a:rPr>
+              <a:t>the title text </a:t>
+            </a:r>
+            <a:r>
+              <a:rPr b="0" lang="en-US" sz="4400" strike="noStrike" u="none">
+                <a:solidFill>
+                  <a:srgbClr val="000000"/>
+                </a:solidFill>
+                <a:effectLst/>
+                <a:uFillTx/>
+                <a:latin typeface="Arial"/>
+              </a:rPr>
+              <a:t>format</a:t>
+            </a:r>
+            <a:endParaRPr b="0" lang="en-US" sz="4400" strike="noStrike" u="none">
+              <a:solidFill>
+                <a:srgbClr val="000000"/>
+              </a:solidFill>
+              <a:effectLst/>
+              <a:uFillTx/>
+              <a:latin typeface="Arial"/>
             </a:endParaRPr>
           </a:p>
         </p:txBody>
@@ -3007,21 +3145,21 @@
             <a:r>
               <a:rPr b="0" lang="en-US" sz="3200" strike="noStrike" u="none">
                 <a:solidFill>
-                  <a:schemeClr val="dk1"/>
-                </a:solidFill>
-                <a:effectLst/>
-                <a:uFillTx/>
-                <a:latin typeface="Calibri"/>
+                  <a:srgbClr val="000000"/>
+                </a:solidFill>
+                <a:effectLst/>
+                <a:uFillTx/>
+                <a:latin typeface="Arial"/>
               </a:rPr>
               <a:t>Click to edit the outline text format</a:t>
             </a:r>
             <a:endParaRPr b="0" lang="en-US" sz="3200" strike="noStrike" u="none">
               <a:solidFill>
-                <a:schemeClr val="dk1"/>
-              </a:solidFill>
-              <a:effectLst/>
-              <a:uFillTx/>
-              <a:latin typeface="Calibri"/>
+                <a:srgbClr val="000000"/>
+              </a:solidFill>
+              <a:effectLst/>
+              <a:uFillTx/>
+              <a:latin typeface="Arial"/>
             </a:endParaRPr>
           </a:p>
           <a:p>
@@ -3037,23 +3175,23 @@
               <a:buChar char=""/>
             </a:pPr>
             <a:r>
-              <a:rPr b="0" lang="en-US" sz="2400" strike="noStrike" u="none">
-                <a:solidFill>
-                  <a:schemeClr val="dk1"/>
-                </a:solidFill>
-                <a:effectLst/>
-                <a:uFillTx/>
-                <a:latin typeface="Calibri"/>
+              <a:rPr b="0" lang="en-US" sz="2800" strike="noStrike" u="none">
+                <a:solidFill>
+                  <a:srgbClr val="000000"/>
+                </a:solidFill>
+                <a:effectLst/>
+                <a:uFillTx/>
+                <a:latin typeface="Arial"/>
               </a:rPr>
               <a:t>Second Outline Level</a:t>
             </a:r>
-            <a:endParaRPr b="0" lang="en-US" sz="2400" strike="noStrike" u="none">
-              <a:solidFill>
-                <a:schemeClr val="dk1"/>
-              </a:solidFill>
-              <a:effectLst/>
-              <a:uFillTx/>
-              <a:latin typeface="Calibri"/>
+            <a:endParaRPr b="0" lang="en-US" sz="2800" strike="noStrike" u="none">
+              <a:solidFill>
+                <a:srgbClr val="000000"/>
+              </a:solidFill>
+              <a:effectLst/>
+              <a:uFillTx/>
+              <a:latin typeface="Arial"/>
             </a:endParaRPr>
           </a:p>
           <a:p>
@@ -3069,23 +3207,23 @@
               <a:buChar char=""/>
             </a:pPr>
             <a:r>
-              <a:rPr b="0" lang="en-US" sz="2000" strike="noStrike" u="none">
-                <a:solidFill>
-                  <a:schemeClr val="dk1"/>
-                </a:solidFill>
-                <a:effectLst/>
-                <a:uFillTx/>
-                <a:latin typeface="Calibri"/>
+              <a:rPr b="0" lang="en-US" sz="2400" strike="noStrike" u="none">
+                <a:solidFill>
+                  <a:srgbClr val="000000"/>
+                </a:solidFill>
+                <a:effectLst/>
+                <a:uFillTx/>
+                <a:latin typeface="Arial"/>
               </a:rPr>
               <a:t>Third Outline Level</a:t>
             </a:r>
-            <a:endParaRPr b="0" lang="en-US" sz="2000" strike="noStrike" u="none">
-              <a:solidFill>
-                <a:schemeClr val="dk1"/>
-              </a:solidFill>
-              <a:effectLst/>
-              <a:uFillTx/>
-              <a:latin typeface="Calibri"/>
+            <a:endParaRPr b="0" lang="en-US" sz="2400" strike="noStrike" u="none">
+              <a:solidFill>
+                <a:srgbClr val="000000"/>
+              </a:solidFill>
+              <a:effectLst/>
+              <a:uFillTx/>
+              <a:latin typeface="Arial"/>
             </a:endParaRPr>
           </a:p>
           <a:p>
@@ -3103,21 +3241,21 @@
             <a:r>
               <a:rPr b="0" lang="en-US" sz="2000" strike="noStrike" u="none">
                 <a:solidFill>
-                  <a:schemeClr val="dk1"/>
-                </a:solidFill>
-                <a:effectLst/>
-                <a:uFillTx/>
-                <a:latin typeface="Calibri"/>
+                  <a:srgbClr val="000000"/>
+                </a:solidFill>
+                <a:effectLst/>
+                <a:uFillTx/>
+                <a:latin typeface="Arial"/>
               </a:rPr>
               <a:t>Fourth Outline Level</a:t>
             </a:r>
             <a:endParaRPr b="0" lang="en-US" sz="2000" strike="noStrike" u="none">
               <a:solidFill>
-                <a:schemeClr val="dk1"/>
-              </a:solidFill>
-              <a:effectLst/>
-              <a:uFillTx/>
-              <a:latin typeface="Calibri"/>
+                <a:srgbClr val="000000"/>
+              </a:solidFill>
+              <a:effectLst/>
+              <a:uFillTx/>
+              <a:latin typeface="Arial"/>
             </a:endParaRPr>
           </a:p>
           <a:p>
@@ -3135,21 +3273,21 @@
             <a:r>
               <a:rPr b="0" lang="en-US" sz="2000" strike="noStrike" u="none">
                 <a:solidFill>
-                  <a:schemeClr val="dk1"/>
-                </a:solidFill>
-                <a:effectLst/>
-                <a:uFillTx/>
-                <a:latin typeface="Calibri"/>
+                  <a:srgbClr val="000000"/>
+                </a:solidFill>
+                <a:effectLst/>
+                <a:uFillTx/>
+                <a:latin typeface="Arial"/>
               </a:rPr>
               <a:t>Fifth Outline Level</a:t>
             </a:r>
             <a:endParaRPr b="0" lang="en-US" sz="2000" strike="noStrike" u="none">
               <a:solidFill>
-                <a:schemeClr val="dk1"/>
-              </a:solidFill>
-              <a:effectLst/>
-              <a:uFillTx/>
-              <a:latin typeface="Calibri"/>
+                <a:srgbClr val="000000"/>
+              </a:solidFill>
+              <a:effectLst/>
+              <a:uFillTx/>
+              <a:latin typeface="Arial"/>
             </a:endParaRPr>
           </a:p>
           <a:p>
@@ -3167,21 +3305,21 @@
             <a:r>
               <a:rPr b="0" lang="en-US" sz="2000" strike="noStrike" u="none">
                 <a:solidFill>
-                  <a:schemeClr val="dk1"/>
-                </a:solidFill>
-                <a:effectLst/>
-                <a:uFillTx/>
-                <a:latin typeface="Calibri"/>
+                  <a:srgbClr val="000000"/>
+                </a:solidFill>
+                <a:effectLst/>
+                <a:uFillTx/>
+                <a:latin typeface="Arial"/>
               </a:rPr>
               <a:t>Sixth Outline Level</a:t>
             </a:r>
             <a:endParaRPr b="0" lang="en-US" sz="2000" strike="noStrike" u="none">
               <a:solidFill>
-                <a:schemeClr val="dk1"/>
-              </a:solidFill>
-              <a:effectLst/>
-              <a:uFillTx/>
-              <a:latin typeface="Calibri"/>
+                <a:srgbClr val="000000"/>
+              </a:solidFill>
+              <a:effectLst/>
+              <a:uFillTx/>
+              <a:latin typeface="Arial"/>
             </a:endParaRPr>
           </a:p>
           <a:p>
@@ -3199,21 +3337,21 @@
             <a:r>
               <a:rPr b="0" lang="en-US" sz="2000" strike="noStrike" u="none">
                 <a:solidFill>
-                  <a:schemeClr val="dk1"/>
-                </a:solidFill>
-                <a:effectLst/>
-                <a:uFillTx/>
-                <a:latin typeface="Calibri"/>
+                  <a:srgbClr val="000000"/>
+                </a:solidFill>
+                <a:effectLst/>
+                <a:uFillTx/>
+                <a:latin typeface="Arial"/>
               </a:rPr>
               <a:t>Seventh Outline Level</a:t>
             </a:r>
             <a:endParaRPr b="0" lang="en-US" sz="2000" strike="noStrike" u="none">
               <a:solidFill>
-                <a:schemeClr val="dk1"/>
-              </a:solidFill>
-              <a:effectLst/>
-              <a:uFillTx/>
-              <a:latin typeface="Calibri"/>
+                <a:srgbClr val="000000"/>
+              </a:solidFill>
+              <a:effectLst/>
+              <a:uFillTx/>
+              <a:latin typeface="Arial"/>
             </a:endParaRPr>
           </a:p>
         </p:txBody>
@@ -3260,7 +3398,7 @@
         <p:spPr>
           <a:xfrm>
             <a:off x="952560" y="457200"/>
-            <a:ext cx="4678920" cy="333000"/>
+            <a:ext cx="4678560" cy="332640"/>
           </a:xfrm>
           <a:prstGeom prst="rect">
             <a:avLst/>
@@ -3321,7 +3459,7 @@
         <p:spPr>
           <a:xfrm>
             <a:off x="16247160" y="457200"/>
-            <a:ext cx="1164240" cy="333000"/>
+            <a:ext cx="1163880" cy="332640"/>
           </a:xfrm>
           <a:prstGeom prst="rect">
             <a:avLst/>
@@ -3382,7 +3520,7 @@
         <p:spPr>
           <a:xfrm>
             <a:off x="952560" y="2786040"/>
-            <a:ext cx="16874280" cy="333000"/>
+            <a:ext cx="16873920" cy="332640"/>
           </a:xfrm>
           <a:prstGeom prst="rect">
             <a:avLst/>
@@ -3443,7 +3581,7 @@
         <p:spPr>
           <a:xfrm>
             <a:off x="952560" y="3424320"/>
-            <a:ext cx="15696720" cy="2278080"/>
+            <a:ext cx="15696360" cy="2277720"/>
           </a:xfrm>
           <a:prstGeom prst="rect">
             <a:avLst/>
@@ -3504,7 +3642,7 @@
         <p:spPr>
           <a:xfrm>
             <a:off x="952560" y="6350040"/>
-            <a:ext cx="4571640" cy="9000"/>
+            <a:ext cx="4571280" cy="8640"/>
           </a:xfrm>
           <a:prstGeom prst="rect">
             <a:avLst/>
@@ -3527,6 +3665,11 @@
             <a:noAutofit/>
           </a:bodyPr>
           <a:p>
+            <a:pPr>
+              <a:lnSpc>
+                <a:spcPct val="100000"/>
+              </a:lnSpc>
+            </a:pPr>
             <a:endParaRPr b="0" lang="en-US" sz="1800" strike="noStrike" u="none">
               <a:solidFill>
                 <a:srgbClr val="000000"/>
@@ -3547,7 +3690,7 @@
         <p:spPr>
           <a:xfrm>
             <a:off x="952560" y="6626520"/>
-            <a:ext cx="2705400" cy="397800"/>
+            <a:ext cx="2705040" cy="397440"/>
           </a:xfrm>
           <a:prstGeom prst="rect">
             <a:avLst/>
@@ -3608,7 +3751,7 @@
         <p:spPr>
           <a:xfrm>
             <a:off x="952560" y="7062480"/>
-            <a:ext cx="2705400" cy="475920"/>
+            <a:ext cx="2705040" cy="475560"/>
           </a:xfrm>
           <a:prstGeom prst="rect">
             <a:avLst/>
@@ -3669,7 +3812,7 @@
         <p:spPr>
           <a:xfrm>
             <a:off x="4912920" y="6626520"/>
-            <a:ext cx="2444400" cy="397800"/>
+            <a:ext cx="2444040" cy="397440"/>
           </a:xfrm>
           <a:prstGeom prst="rect">
             <a:avLst/>
@@ -3730,7 +3873,7 @@
         <p:spPr>
           <a:xfrm>
             <a:off x="4912920" y="7062480"/>
-            <a:ext cx="2444400" cy="475920"/>
+            <a:ext cx="2444040" cy="475560"/>
           </a:xfrm>
           <a:prstGeom prst="rect">
             <a:avLst/>
@@ -3791,7 +3934,7 @@
         <p:spPr>
           <a:xfrm>
             <a:off x="952560" y="9496440"/>
-            <a:ext cx="7303680" cy="333000"/>
+            <a:ext cx="7303320" cy="332640"/>
           </a:xfrm>
           <a:prstGeom prst="rect">
             <a:avLst/>
@@ -3852,7 +3995,7 @@
         <p:spPr>
           <a:xfrm>
             <a:off x="16128360" y="9496440"/>
-            <a:ext cx="1283040" cy="333000"/>
+            <a:ext cx="1282680" cy="332640"/>
           </a:xfrm>
           <a:prstGeom prst="rect">
             <a:avLst/>
@@ -3943,14 +4086,14 @@
       </p:grpSpPr>
       <p:sp>
         <p:nvSpPr>
-          <p:cNvPr id="155" name="Text 0"/>
+          <p:cNvPr id="156" name="Text 0"/>
           <p:cNvSpPr/>
           <p:nvPr/>
         </p:nvSpPr>
         <p:spPr>
           <a:xfrm>
             <a:off x="952560" y="457200"/>
-            <a:ext cx="1354680" cy="333000"/>
+            <a:ext cx="1354320" cy="332640"/>
           </a:xfrm>
           <a:prstGeom prst="rect">
             <a:avLst/>
@@ -4004,14 +4147,14 @@
       </p:sp>
       <p:sp>
         <p:nvSpPr>
-          <p:cNvPr id="156" name="Text 1"/>
+          <p:cNvPr id="157" name="Text 1"/>
           <p:cNvSpPr/>
           <p:nvPr/>
         </p:nvSpPr>
         <p:spPr>
           <a:xfrm>
             <a:off x="16247160" y="457200"/>
-            <a:ext cx="1164240" cy="333000"/>
+            <a:ext cx="1163880" cy="332640"/>
           </a:xfrm>
           <a:prstGeom prst="rect">
             <a:avLst/>
@@ -4065,14 +4208,14 @@
       </p:sp>
       <p:sp>
         <p:nvSpPr>
-          <p:cNvPr id="157" name="Text 2"/>
+          <p:cNvPr id="158" name="Text 2"/>
           <p:cNvSpPr/>
           <p:nvPr/>
         </p:nvSpPr>
         <p:spPr>
           <a:xfrm>
             <a:off x="952560" y="1047600"/>
-            <a:ext cx="16874280" cy="333000"/>
+            <a:ext cx="16873920" cy="332640"/>
           </a:xfrm>
           <a:prstGeom prst="rect">
             <a:avLst/>
@@ -4126,14 +4269,14 @@
       </p:sp>
       <p:sp>
         <p:nvSpPr>
-          <p:cNvPr id="158" name="Text 3"/>
+          <p:cNvPr id="159" name="Text 3"/>
           <p:cNvSpPr/>
           <p:nvPr/>
         </p:nvSpPr>
         <p:spPr>
           <a:xfrm>
             <a:off x="952560" y="1685880"/>
-            <a:ext cx="16678080" cy="708120"/>
+            <a:ext cx="16677720" cy="707760"/>
           </a:xfrm>
           <a:prstGeom prst="rect">
             <a:avLst/>
@@ -4187,14 +4330,14 @@
       </p:sp>
       <p:sp>
         <p:nvSpPr>
-          <p:cNvPr id="159" name="Shape 4"/>
+          <p:cNvPr id="160" name="Shape 4"/>
           <p:cNvSpPr/>
           <p:nvPr/>
         </p:nvSpPr>
         <p:spPr>
           <a:xfrm>
             <a:off x="952560" y="2813760"/>
-            <a:ext cx="8000640" cy="5321880"/>
+            <a:ext cx="8000280" cy="5321520"/>
           </a:xfrm>
           <a:prstGeom prst="rect">
             <a:avLst/>
@@ -4220,6 +4363,11 @@
             <a:noAutofit/>
           </a:bodyPr>
           <a:p>
+            <a:pPr>
+              <a:lnSpc>
+                <a:spcPct val="100000"/>
+              </a:lnSpc>
+            </a:pPr>
             <a:endParaRPr b="0" lang="en-US" sz="1800" strike="noStrike" u="none">
               <a:solidFill>
                 <a:srgbClr val="000000"/>
@@ -4233,14 +4381,14 @@
       </p:sp>
       <p:sp>
         <p:nvSpPr>
-          <p:cNvPr id="160" name="Text 5"/>
+          <p:cNvPr id="161" name="Text 5"/>
           <p:cNvSpPr/>
           <p:nvPr/>
         </p:nvSpPr>
         <p:spPr>
           <a:xfrm>
             <a:off x="1228680" y="3051720"/>
-            <a:ext cx="7671600" cy="333000"/>
+            <a:ext cx="7671240" cy="332640"/>
           </a:xfrm>
           <a:prstGeom prst="rect">
             <a:avLst/>
@@ -4294,7 +4442,7 @@
       </p:sp>
       <p:pic>
         <p:nvPicPr>
-          <p:cNvPr id="161" name="Image 0" descr="preencoded.png"/>
+          <p:cNvPr id="162" name="Image 0" descr="preencoded.png"/>
           <p:cNvPicPr/>
           <p:nvPr/>
         </p:nvPicPr>
@@ -4305,7 +4453,7 @@
         <p:spPr>
           <a:xfrm>
             <a:off x="1228680" y="3480480"/>
-            <a:ext cx="7448040" cy="3723840"/>
+            <a:ext cx="7447680" cy="3723480"/>
           </a:xfrm>
           <a:prstGeom prst="rect">
             <a:avLst/>
@@ -4318,14 +4466,14 @@
       </p:pic>
       <p:sp>
         <p:nvSpPr>
-          <p:cNvPr id="162" name="Text 6"/>
+          <p:cNvPr id="163" name="Text 6"/>
           <p:cNvSpPr/>
           <p:nvPr/>
         </p:nvSpPr>
         <p:spPr>
           <a:xfrm>
             <a:off x="1228680" y="7337880"/>
-            <a:ext cx="7671600" cy="654840"/>
+            <a:ext cx="7671240" cy="654480"/>
           </a:xfrm>
           <a:prstGeom prst="rect">
             <a:avLst/>
@@ -4379,14 +4527,14 @@
       </p:sp>
       <p:sp>
         <p:nvSpPr>
-          <p:cNvPr id="163" name="Shape 7"/>
+          <p:cNvPr id="164" name="Shape 7"/>
           <p:cNvSpPr/>
           <p:nvPr/>
         </p:nvSpPr>
         <p:spPr>
           <a:xfrm>
             <a:off x="9334440" y="2813760"/>
-            <a:ext cx="8000640" cy="5321880"/>
+            <a:ext cx="8000280" cy="5321520"/>
           </a:xfrm>
           <a:prstGeom prst="rect">
             <a:avLst/>
@@ -4412,6 +4560,11 @@
             <a:noAutofit/>
           </a:bodyPr>
           <a:p>
+            <a:pPr>
+              <a:lnSpc>
+                <a:spcPct val="100000"/>
+              </a:lnSpc>
+            </a:pPr>
             <a:endParaRPr b="0" lang="en-US" sz="1800" strike="noStrike" u="none">
               <a:solidFill>
                 <a:srgbClr val="000000"/>
@@ -4425,14 +4578,14 @@
       </p:sp>
       <p:sp>
         <p:nvSpPr>
-          <p:cNvPr id="164" name="Text 8"/>
+          <p:cNvPr id="165" name="Text 8"/>
           <p:cNvSpPr/>
           <p:nvPr/>
         </p:nvSpPr>
         <p:spPr>
           <a:xfrm>
             <a:off x="9610560" y="3051720"/>
-            <a:ext cx="7671600" cy="333000"/>
+            <a:ext cx="7671240" cy="332640"/>
           </a:xfrm>
           <a:prstGeom prst="rect">
             <a:avLst/>
@@ -4486,7 +4639,7 @@
       </p:sp>
       <p:pic>
         <p:nvPicPr>
-          <p:cNvPr id="165" name="Image 1" descr="preencoded.png"/>
+          <p:cNvPr id="166" name="Image 1" descr="preencoded.png"/>
           <p:cNvPicPr/>
           <p:nvPr/>
         </p:nvPicPr>
@@ -4497,7 +4650,7 @@
         <p:spPr>
           <a:xfrm>
             <a:off x="9610560" y="3480480"/>
-            <a:ext cx="7448040" cy="3723840"/>
+            <a:ext cx="7447680" cy="3723480"/>
           </a:xfrm>
           <a:prstGeom prst="rect">
             <a:avLst/>
@@ -4510,14 +4663,14 @@
       </p:pic>
       <p:sp>
         <p:nvSpPr>
-          <p:cNvPr id="166" name="Text 9"/>
+          <p:cNvPr id="167" name="Text 9"/>
           <p:cNvSpPr/>
           <p:nvPr/>
         </p:nvSpPr>
         <p:spPr>
           <a:xfrm>
             <a:off x="9610560" y="7337880"/>
-            <a:ext cx="7671600" cy="654840"/>
+            <a:ext cx="7671240" cy="654480"/>
           </a:xfrm>
           <a:prstGeom prst="rect">
             <a:avLst/>
@@ -4571,14 +4724,14 @@
       </p:sp>
       <p:sp>
         <p:nvSpPr>
-          <p:cNvPr id="167" name="Text 10"/>
+          <p:cNvPr id="168" name="Text 10"/>
           <p:cNvSpPr/>
           <p:nvPr/>
         </p:nvSpPr>
         <p:spPr>
           <a:xfrm>
             <a:off x="952560" y="9496440"/>
-            <a:ext cx="2490120" cy="333000"/>
+            <a:ext cx="2489760" cy="332640"/>
           </a:xfrm>
           <a:prstGeom prst="rect">
             <a:avLst/>
@@ -4632,14 +4785,14 @@
       </p:sp>
       <p:sp>
         <p:nvSpPr>
-          <p:cNvPr id="168" name="Text 11"/>
+          <p:cNvPr id="169" name="Text 11"/>
           <p:cNvSpPr/>
           <p:nvPr/>
         </p:nvSpPr>
         <p:spPr>
           <a:xfrm>
             <a:off x="16279200" y="9496440"/>
-            <a:ext cx="1132200" cy="333000"/>
+            <a:ext cx="1131840" cy="332640"/>
           </a:xfrm>
           <a:prstGeom prst="rect">
             <a:avLst/>
@@ -4730,14 +4883,14 @@
       </p:grpSpPr>
       <p:sp>
         <p:nvSpPr>
-          <p:cNvPr id="169" name="Text 0"/>
+          <p:cNvPr id="170" name="Text 0"/>
           <p:cNvSpPr/>
           <p:nvPr/>
         </p:nvSpPr>
         <p:spPr>
           <a:xfrm>
             <a:off x="952560" y="457200"/>
-            <a:ext cx="1354680" cy="333000"/>
+            <a:ext cx="1354320" cy="332640"/>
           </a:xfrm>
           <a:prstGeom prst="rect">
             <a:avLst/>
@@ -4791,14 +4944,14 @@
       </p:sp>
       <p:sp>
         <p:nvSpPr>
-          <p:cNvPr id="170" name="Text 1"/>
+          <p:cNvPr id="171" name="Text 1"/>
           <p:cNvSpPr/>
           <p:nvPr/>
         </p:nvSpPr>
         <p:spPr>
           <a:xfrm>
             <a:off x="16247160" y="457200"/>
-            <a:ext cx="1164240" cy="333000"/>
+            <a:ext cx="1163880" cy="332640"/>
           </a:xfrm>
           <a:prstGeom prst="rect">
             <a:avLst/>
@@ -4852,14 +5005,14 @@
       </p:sp>
       <p:sp>
         <p:nvSpPr>
-          <p:cNvPr id="171" name="Text 2"/>
+          <p:cNvPr id="172" name="Text 2"/>
           <p:cNvSpPr/>
           <p:nvPr/>
         </p:nvSpPr>
         <p:spPr>
           <a:xfrm>
             <a:off x="952560" y="1047600"/>
-            <a:ext cx="16874280" cy="333000"/>
+            <a:ext cx="16873920" cy="332640"/>
           </a:xfrm>
           <a:prstGeom prst="rect">
             <a:avLst/>
@@ -4913,14 +5066,14 @@
       </p:sp>
       <p:sp>
         <p:nvSpPr>
-          <p:cNvPr id="172" name="Text 3"/>
+          <p:cNvPr id="173" name="Text 3"/>
           <p:cNvSpPr/>
           <p:nvPr/>
         </p:nvSpPr>
         <p:spPr>
           <a:xfrm>
             <a:off x="952560" y="1685880"/>
-            <a:ext cx="16678080" cy="708120"/>
+            <a:ext cx="16677720" cy="707760"/>
           </a:xfrm>
           <a:prstGeom prst="rect">
             <a:avLst/>
@@ -4974,14 +5127,14 @@
       </p:sp>
       <p:sp>
         <p:nvSpPr>
-          <p:cNvPr id="173" name="Shape 4"/>
+          <p:cNvPr id="174" name="Shape 4"/>
           <p:cNvSpPr/>
           <p:nvPr/>
         </p:nvSpPr>
         <p:spPr>
           <a:xfrm>
             <a:off x="952560" y="2955960"/>
-            <a:ext cx="8804880" cy="5563080"/>
+            <a:ext cx="8804520" cy="5562720"/>
           </a:xfrm>
           <a:prstGeom prst="rect">
             <a:avLst/>
@@ -5007,6 +5160,11 @@
             <a:noAutofit/>
           </a:bodyPr>
           <a:p>
+            <a:pPr>
+              <a:lnSpc>
+                <a:spcPct val="100000"/>
+              </a:lnSpc>
+            </a:pPr>
             <a:endParaRPr b="0" lang="en-US" sz="1800" strike="noStrike" u="none">
               <a:solidFill>
                 <a:srgbClr val="000000"/>
@@ -5020,14 +5178,14 @@
       </p:sp>
       <p:sp>
         <p:nvSpPr>
-          <p:cNvPr id="174" name="Text 5"/>
+          <p:cNvPr id="175" name="Text 5"/>
           <p:cNvSpPr/>
           <p:nvPr/>
         </p:nvSpPr>
         <p:spPr>
           <a:xfrm>
             <a:off x="1228680" y="3194280"/>
-            <a:ext cx="8499960" cy="333000"/>
+            <a:ext cx="8499600" cy="332640"/>
           </a:xfrm>
           <a:prstGeom prst="rect">
             <a:avLst/>
@@ -5081,7 +5239,7 @@
       </p:sp>
       <p:pic>
         <p:nvPicPr>
-          <p:cNvPr id="175" name="Image 0" descr="preencoded.png"/>
+          <p:cNvPr id="176" name="Image 0" descr="preencoded.png"/>
           <p:cNvPicPr/>
           <p:nvPr/>
         </p:nvPicPr>
@@ -5092,7 +5250,7 @@
         <p:spPr>
           <a:xfrm>
             <a:off x="1228680" y="3622680"/>
-            <a:ext cx="8252280" cy="4715280"/>
+            <a:ext cx="8251920" cy="4714920"/>
           </a:xfrm>
           <a:prstGeom prst="rect">
             <a:avLst/>
@@ -5105,14 +5263,14 @@
       </p:pic>
       <p:sp>
         <p:nvSpPr>
-          <p:cNvPr id="176" name="Shape 6"/>
+          <p:cNvPr id="177" name="Shape 6"/>
           <p:cNvSpPr/>
           <p:nvPr/>
         </p:nvSpPr>
         <p:spPr>
           <a:xfrm>
             <a:off x="10291320" y="2661120"/>
-            <a:ext cx="7044120" cy="18720"/>
+            <a:ext cx="7043760" cy="18360"/>
           </a:xfrm>
           <a:prstGeom prst="rect">
             <a:avLst/>
@@ -5135,6 +5293,11 @@
             <a:noAutofit/>
           </a:bodyPr>
           <a:p>
+            <a:pPr>
+              <a:lnSpc>
+                <a:spcPct val="100000"/>
+              </a:lnSpc>
+            </a:pPr>
             <a:endParaRPr b="0" lang="en-US" sz="1800" strike="noStrike" u="none">
               <a:solidFill>
                 <a:srgbClr val="ffffff"/>
@@ -5148,14 +5311,14 @@
       </p:sp>
       <p:sp>
         <p:nvSpPr>
-          <p:cNvPr id="177" name="Text 7"/>
+          <p:cNvPr id="178" name="Text 7"/>
           <p:cNvSpPr/>
           <p:nvPr/>
         </p:nvSpPr>
         <p:spPr>
           <a:xfrm>
             <a:off x="10291320" y="2851560"/>
-            <a:ext cx="7255440" cy="333000"/>
+            <a:ext cx="7255080" cy="332640"/>
           </a:xfrm>
           <a:prstGeom prst="rect">
             <a:avLst/>
@@ -5209,14 +5372,14 @@
       </p:sp>
       <p:sp>
         <p:nvSpPr>
-          <p:cNvPr id="178" name="Text 8"/>
+          <p:cNvPr id="179" name="Text 8"/>
           <p:cNvSpPr/>
           <p:nvPr/>
         </p:nvSpPr>
         <p:spPr>
           <a:xfrm>
             <a:off x="10291320" y="3242160"/>
-            <a:ext cx="7255440" cy="875880"/>
+            <a:ext cx="7255080" cy="875520"/>
           </a:xfrm>
           <a:prstGeom prst="rect">
             <a:avLst/>
@@ -5270,14 +5433,14 @@
       </p:sp>
       <p:sp>
         <p:nvSpPr>
-          <p:cNvPr id="179" name="Text 9"/>
+          <p:cNvPr id="180" name="Text 9"/>
           <p:cNvSpPr/>
           <p:nvPr/>
         </p:nvSpPr>
         <p:spPr>
           <a:xfrm>
             <a:off x="10291320" y="4175640"/>
-            <a:ext cx="7255440" cy="371160"/>
+            <a:ext cx="7255080" cy="370800"/>
           </a:xfrm>
           <a:prstGeom prst="rect">
             <a:avLst/>
@@ -5309,7 +5472,7 @@
             <a:r>
               <a:rPr b="0" lang="en-US" sz="1950" strike="noStrike" u="none">
                 <a:solidFill>
-                  <a:srgbClr val="000000"/>
+                  <a:srgbClr val="00a933"/>
                 </a:solidFill>
                 <a:effectLst/>
                 <a:uFillTx/>
@@ -5320,25 +5483,25 @@
             </a:r>
             <a:endParaRPr b="0" lang="en-US" sz="1950" strike="noStrike" u="none">
               <a:solidFill>
-                <a:srgbClr val="000000"/>
-              </a:solidFill>
-              <a:effectLst/>
-              <a:uFillTx/>
-              <a:latin typeface="Arial"/>
-            </a:endParaRPr>
-          </a:p>
-        </p:txBody>
-      </p:sp>
-      <p:sp>
-        <p:nvSpPr>
-          <p:cNvPr id="180" name="Shape 10"/>
+                <a:srgbClr val="00a933"/>
+              </a:solidFill>
+              <a:effectLst/>
+              <a:uFillTx/>
+              <a:latin typeface="Arial"/>
+            </a:endParaRPr>
+          </a:p>
+        </p:txBody>
+      </p:sp>
+      <p:sp>
+        <p:nvSpPr>
+          <p:cNvPr id="181" name="Shape 10"/>
           <p:cNvSpPr/>
           <p:nvPr/>
         </p:nvSpPr>
         <p:spPr>
           <a:xfrm>
             <a:off x="10291320" y="4813920"/>
-            <a:ext cx="7044120" cy="18720"/>
+            <a:ext cx="7043760" cy="18360"/>
           </a:xfrm>
           <a:prstGeom prst="rect">
             <a:avLst/>
@@ -5361,6 +5524,11 @@
             <a:noAutofit/>
           </a:bodyPr>
           <a:p>
+            <a:pPr>
+              <a:lnSpc>
+                <a:spcPct val="100000"/>
+              </a:lnSpc>
+            </a:pPr>
             <a:endParaRPr b="0" lang="en-US" sz="1800" strike="noStrike" u="none">
               <a:solidFill>
                 <a:srgbClr val="ffffff"/>
@@ -5374,14 +5542,14 @@
       </p:sp>
       <p:sp>
         <p:nvSpPr>
-          <p:cNvPr id="181" name="Text 11"/>
+          <p:cNvPr id="182" name="Text 11"/>
           <p:cNvSpPr/>
           <p:nvPr/>
         </p:nvSpPr>
         <p:spPr>
           <a:xfrm>
             <a:off x="10291320" y="5004360"/>
-            <a:ext cx="7255440" cy="333000"/>
+            <a:ext cx="7255080" cy="332640"/>
           </a:xfrm>
           <a:prstGeom prst="rect">
             <a:avLst/>
@@ -5435,14 +5603,14 @@
       </p:sp>
       <p:sp>
         <p:nvSpPr>
-          <p:cNvPr id="182" name="Text 12"/>
+          <p:cNvPr id="183" name="Text 12"/>
           <p:cNvSpPr/>
           <p:nvPr/>
         </p:nvSpPr>
         <p:spPr>
           <a:xfrm>
             <a:off x="10291320" y="5394960"/>
-            <a:ext cx="7255440" cy="875880"/>
+            <a:ext cx="7255080" cy="875520"/>
           </a:xfrm>
           <a:prstGeom prst="rect">
             <a:avLst/>
@@ -5496,14 +5664,14 @@
       </p:sp>
       <p:sp>
         <p:nvSpPr>
-          <p:cNvPr id="183" name="Text 13"/>
+          <p:cNvPr id="184" name="Text 13"/>
           <p:cNvSpPr/>
           <p:nvPr/>
         </p:nvSpPr>
         <p:spPr>
           <a:xfrm>
             <a:off x="10291320" y="6328440"/>
-            <a:ext cx="7255440" cy="371160"/>
+            <a:ext cx="7255080" cy="370800"/>
           </a:xfrm>
           <a:prstGeom prst="rect">
             <a:avLst/>
@@ -5535,6 +5703,67 @@
             <a:r>
               <a:rPr b="0" lang="en-US" sz="1950" strike="noStrike" u="none">
                 <a:solidFill>
+                  <a:srgbClr val="00a933"/>
+                </a:solidFill>
+                <a:effectLst/>
+                <a:uFillTx/>
+                <a:latin typeface="Arial"/>
+                <a:ea typeface="Arial"/>
+              </a:rPr>
+              <a:t>0.37 → 0.08</a:t>
+            </a:r>
+            <a:endParaRPr b="0" lang="en-US" sz="1950" strike="noStrike" u="none">
+              <a:solidFill>
+                <a:srgbClr val="00a933"/>
+              </a:solidFill>
+              <a:effectLst/>
+              <a:uFillTx/>
+              <a:latin typeface="Arial"/>
+            </a:endParaRPr>
+          </a:p>
+        </p:txBody>
+      </p:sp>
+      <p:sp>
+        <p:nvSpPr>
+          <p:cNvPr id="185" name="Text 14"/>
+          <p:cNvSpPr/>
+          <p:nvPr/>
+        </p:nvSpPr>
+        <p:spPr>
+          <a:xfrm>
+            <a:off x="10291320" y="7157160"/>
+            <a:ext cx="7255080" cy="332640"/>
+          </a:xfrm>
+          <a:prstGeom prst="rect">
+            <a:avLst/>
+          </a:prstGeom>
+          <a:noFill/>
+          <a:ln w="0">
+            <a:noFill/>
+          </a:ln>
+        </p:spPr>
+        <p:style>
+          <a:lnRef idx="0"/>
+          <a:fillRef idx="0"/>
+          <a:effectRef idx="0"/>
+          <a:fontRef idx="minor"/>
+        </p:style>
+        <p:txBody>
+          <a:bodyPr lIns="25560" rIns="25560" tIns="25560" bIns="25560" anchor="t">
+            <a:normAutofit/>
+          </a:bodyPr>
+          <a:p>
+            <a:pPr defTabSz="914400">
+              <a:lnSpc>
+                <a:spcPct val="100000"/>
+              </a:lnSpc>
+              <a:tabLst>
+                <a:tab algn="l" pos="0"/>
+              </a:tabLst>
+            </a:pPr>
+            <a:r>
+              <a:rPr b="0" lang="en-US" sz="1800" spc="252" strike="noStrike" u="none">
+                <a:solidFill>
                   <a:srgbClr val="000000"/>
                 </a:solidFill>
                 <a:effectLst/>
@@ -5542,29 +5771,151 @@
                 <a:latin typeface="Arial"/>
                 <a:ea typeface="Arial"/>
               </a:rPr>
-              <a:t>0.37 → 0.08</a:t>
+              <a:t>FAR · FALSE ACCEPT</a:t>
+            </a:r>
+            <a:endParaRPr b="0" lang="en-US" sz="1800" strike="noStrike" u="none">
+              <a:solidFill>
+                <a:srgbClr val="000000"/>
+              </a:solidFill>
+              <a:effectLst/>
+              <a:uFillTx/>
+              <a:latin typeface="Arial"/>
+            </a:endParaRPr>
+          </a:p>
+        </p:txBody>
+      </p:sp>
+      <p:sp>
+        <p:nvSpPr>
+          <p:cNvPr id="186" name="Text 15"/>
+          <p:cNvSpPr/>
+          <p:nvPr/>
+        </p:nvSpPr>
+        <p:spPr>
+          <a:xfrm>
+            <a:off x="10291320" y="7547400"/>
+            <a:ext cx="7255080" cy="875520"/>
+          </a:xfrm>
+          <a:prstGeom prst="rect">
+            <a:avLst/>
+          </a:prstGeom>
+          <a:noFill/>
+          <a:ln w="0">
+            <a:noFill/>
+          </a:ln>
+        </p:spPr>
+        <p:style>
+          <a:lnRef idx="0"/>
+          <a:fillRef idx="0"/>
+          <a:effectRef idx="0"/>
+          <a:fontRef idx="minor"/>
+        </p:style>
+        <p:txBody>
+          <a:bodyPr lIns="25560" rIns="25560" tIns="25560" bIns="25560" anchor="t">
+            <a:normAutofit fontScale="92500" lnSpcReduction="19999"/>
+          </a:bodyPr>
+          <a:p>
+            <a:pPr defTabSz="914400">
+              <a:lnSpc>
+                <a:spcPct val="100000"/>
+              </a:lnSpc>
+              <a:tabLst>
+                <a:tab algn="l" pos="0"/>
+              </a:tabLst>
+            </a:pPr>
+            <a:r>
+              <a:rPr b="0" lang="en-US" sz="6600" strike="noStrike" u="none">
+                <a:solidFill>
+                  <a:srgbClr val="000000"/>
+                </a:solidFill>
+                <a:effectLst/>
+                <a:uFillTx/>
+                <a:latin typeface="Arial"/>
+                <a:ea typeface="Arial"/>
+              </a:rPr>
+              <a:t>+32 pt</a:t>
+            </a:r>
+            <a:endParaRPr b="0" lang="en-US" sz="6600" strike="noStrike" u="none">
+              <a:solidFill>
+                <a:srgbClr val="000000"/>
+              </a:solidFill>
+              <a:effectLst/>
+              <a:uFillTx/>
+              <a:latin typeface="Arial"/>
+            </a:endParaRPr>
+          </a:p>
+        </p:txBody>
+      </p:sp>
+      <p:sp>
+        <p:nvSpPr>
+          <p:cNvPr id="187" name="Text 16"/>
+          <p:cNvSpPr/>
+          <p:nvPr/>
+        </p:nvSpPr>
+        <p:spPr>
+          <a:xfrm>
+            <a:off x="10291320" y="8480880"/>
+            <a:ext cx="7255080" cy="370800"/>
+          </a:xfrm>
+          <a:prstGeom prst="rect">
+            <a:avLst/>
+          </a:prstGeom>
+          <a:noFill/>
+          <a:ln w="0">
+            <a:noFill/>
+          </a:ln>
+        </p:spPr>
+        <p:style>
+          <a:lnRef idx="0"/>
+          <a:fillRef idx="0"/>
+          <a:effectRef idx="0"/>
+          <a:fontRef idx="minor"/>
+        </p:style>
+        <p:txBody>
+          <a:bodyPr lIns="25560" rIns="25560" tIns="25560" bIns="25560" anchor="t">
+            <a:normAutofit/>
+          </a:bodyPr>
+          <a:p>
+            <a:pPr defTabSz="914400">
+              <a:lnSpc>
+                <a:spcPct val="100000"/>
+              </a:lnSpc>
+              <a:tabLst>
+                <a:tab algn="l" pos="0"/>
+              </a:tabLst>
+            </a:pPr>
+            <a:r>
+              <a:rPr b="0" lang="en-US" sz="1950" strike="noStrike" u="none">
+                <a:solidFill>
+                  <a:srgbClr val="ff0000"/>
+                </a:solidFill>
+                <a:effectLst/>
+                <a:uFillTx/>
+                <a:latin typeface="Arial"/>
+                <a:ea typeface="Arial"/>
+              </a:rPr>
+              <a:t>0.11 → 0.43</a:t>
             </a:r>
             <a:endParaRPr b="0" lang="en-US" sz="1950" strike="noStrike" u="none">
               <a:solidFill>
-                <a:srgbClr val="000000"/>
-              </a:solidFill>
-              <a:effectLst/>
-              <a:uFillTx/>
-              <a:latin typeface="Arial"/>
-            </a:endParaRPr>
-          </a:p>
-        </p:txBody>
-      </p:sp>
-      <p:sp>
-        <p:nvSpPr>
-          <p:cNvPr id="184" name="Text 14"/>
-          <p:cNvSpPr/>
-          <p:nvPr/>
-        </p:nvSpPr>
-        <p:spPr>
-          <a:xfrm>
-            <a:off x="10291320" y="7157160"/>
-            <a:ext cx="7255440" cy="333000"/>
+                <a:srgbClr val="ff0000"/>
+              </a:solidFill>
+              <a:effectLst/>
+              <a:uFillTx/>
+              <a:latin typeface="Arial"/>
+            </a:endParaRPr>
+          </a:p>
+        </p:txBody>
+      </p:sp>
+      <p:sp>
+        <p:nvSpPr>
+          <p:cNvPr id="188" name="Text 17"/>
+          <p:cNvSpPr/>
+          <p:nvPr/>
+        </p:nvSpPr>
+        <p:spPr>
+          <a:xfrm>
+            <a:off x="952560" y="9496440"/>
+            <a:ext cx="2338560" cy="332640"/>
           </a:xfrm>
           <a:prstGeom prst="rect">
             <a:avLst/>
@@ -5594,16 +5945,16 @@
               </a:tabLst>
             </a:pPr>
             <a:r>
-              <a:rPr b="0" lang="en-US" sz="1800" spc="252" strike="noStrike" u="none">
-                <a:solidFill>
-                  <a:srgbClr val="000000"/>
-                </a:solidFill>
-                <a:effectLst/>
-                <a:uFillTx/>
-                <a:latin typeface="Arial"/>
-                <a:ea typeface="Arial"/>
-              </a:rPr>
-              <a:t>FAR · FALSE ACCEPT</a:t>
+              <a:rPr b="0" lang="en-US" sz="1800" spc="108" strike="noStrike" u="none">
+                <a:solidFill>
+                  <a:srgbClr val="6b6b75"/>
+                </a:solidFill>
+                <a:effectLst/>
+                <a:uFillTx/>
+                <a:latin typeface="Arial"/>
+                <a:ea typeface="Arial"/>
+              </a:rPr>
+              <a:t>RESULTS · RATES</a:t>
             </a:r>
             <a:endParaRPr b="0" lang="en-US" sz="1800" strike="noStrike" u="none">
               <a:solidFill>
@@ -5618,197 +5969,14 @@
       </p:sp>
       <p:sp>
         <p:nvSpPr>
-          <p:cNvPr id="185" name="Text 15"/>
-          <p:cNvSpPr/>
-          <p:nvPr/>
-        </p:nvSpPr>
-        <p:spPr>
-          <a:xfrm>
-            <a:off x="10291320" y="7547400"/>
-            <a:ext cx="7255440" cy="875880"/>
-          </a:xfrm>
-          <a:prstGeom prst="rect">
-            <a:avLst/>
-          </a:prstGeom>
-          <a:noFill/>
-          <a:ln w="0">
-            <a:noFill/>
-          </a:ln>
-        </p:spPr>
-        <p:style>
-          <a:lnRef idx="0"/>
-          <a:fillRef idx="0"/>
-          <a:effectRef idx="0"/>
-          <a:fontRef idx="minor"/>
-        </p:style>
-        <p:txBody>
-          <a:bodyPr lIns="25560" rIns="25560" tIns="25560" bIns="25560" anchor="t">
-            <a:normAutofit fontScale="92500" lnSpcReduction="19999"/>
-          </a:bodyPr>
-          <a:p>
-            <a:pPr defTabSz="914400">
-              <a:lnSpc>
-                <a:spcPct val="100000"/>
-              </a:lnSpc>
-              <a:tabLst>
-                <a:tab algn="l" pos="0"/>
-              </a:tabLst>
-            </a:pPr>
-            <a:r>
-              <a:rPr b="0" lang="en-US" sz="6600" strike="noStrike" u="none">
-                <a:solidFill>
-                  <a:srgbClr val="000000"/>
-                </a:solidFill>
-                <a:effectLst/>
-                <a:uFillTx/>
-                <a:latin typeface="Arial"/>
-                <a:ea typeface="Arial"/>
-              </a:rPr>
-              <a:t>+32 pt</a:t>
-            </a:r>
-            <a:endParaRPr b="0" lang="en-US" sz="6600" strike="noStrike" u="none">
-              <a:solidFill>
-                <a:srgbClr val="000000"/>
-              </a:solidFill>
-              <a:effectLst/>
-              <a:uFillTx/>
-              <a:latin typeface="Arial"/>
-            </a:endParaRPr>
-          </a:p>
-        </p:txBody>
-      </p:sp>
-      <p:sp>
-        <p:nvSpPr>
-          <p:cNvPr id="186" name="Text 16"/>
-          <p:cNvSpPr/>
-          <p:nvPr/>
-        </p:nvSpPr>
-        <p:spPr>
-          <a:xfrm>
-            <a:off x="10291320" y="8480880"/>
-            <a:ext cx="7255440" cy="371160"/>
-          </a:xfrm>
-          <a:prstGeom prst="rect">
-            <a:avLst/>
-          </a:prstGeom>
-          <a:noFill/>
-          <a:ln w="0">
-            <a:noFill/>
-          </a:ln>
-        </p:spPr>
-        <p:style>
-          <a:lnRef idx="0"/>
-          <a:fillRef idx="0"/>
-          <a:effectRef idx="0"/>
-          <a:fontRef idx="minor"/>
-        </p:style>
-        <p:txBody>
-          <a:bodyPr lIns="25560" rIns="25560" tIns="25560" bIns="25560" anchor="t">
-            <a:normAutofit/>
-          </a:bodyPr>
-          <a:p>
-            <a:pPr defTabSz="914400">
-              <a:lnSpc>
-                <a:spcPct val="100000"/>
-              </a:lnSpc>
-              <a:tabLst>
-                <a:tab algn="l" pos="0"/>
-              </a:tabLst>
-            </a:pPr>
-            <a:r>
-              <a:rPr b="0" lang="en-US" sz="1950" strike="noStrike" u="none">
-                <a:solidFill>
-                  <a:srgbClr val="000000"/>
-                </a:solidFill>
-                <a:effectLst/>
-                <a:uFillTx/>
-                <a:latin typeface="Arial"/>
-                <a:ea typeface="Arial"/>
-              </a:rPr>
-              <a:t>0.11 → 0.43</a:t>
-            </a:r>
-            <a:endParaRPr b="0" lang="en-US" sz="1950" strike="noStrike" u="none">
-              <a:solidFill>
-                <a:srgbClr val="000000"/>
-              </a:solidFill>
-              <a:effectLst/>
-              <a:uFillTx/>
-              <a:latin typeface="Arial"/>
-            </a:endParaRPr>
-          </a:p>
-        </p:txBody>
-      </p:sp>
-      <p:sp>
-        <p:nvSpPr>
-          <p:cNvPr id="187" name="Text 17"/>
-          <p:cNvSpPr/>
-          <p:nvPr/>
-        </p:nvSpPr>
-        <p:spPr>
-          <a:xfrm>
-            <a:off x="952560" y="9496440"/>
-            <a:ext cx="2338920" cy="333000"/>
-          </a:xfrm>
-          <a:prstGeom prst="rect">
-            <a:avLst/>
-          </a:prstGeom>
-          <a:noFill/>
-          <a:ln w="0">
-            <a:noFill/>
-          </a:ln>
-        </p:spPr>
-        <p:style>
-          <a:lnRef idx="0"/>
-          <a:fillRef idx="0"/>
-          <a:effectRef idx="0"/>
-          <a:fontRef idx="minor"/>
-        </p:style>
-        <p:txBody>
-          <a:bodyPr lIns="25560" rIns="25560" tIns="25560" bIns="25560" anchor="t">
-            <a:normAutofit/>
-          </a:bodyPr>
-          <a:p>
-            <a:pPr defTabSz="914400">
-              <a:lnSpc>
-                <a:spcPct val="100000"/>
-              </a:lnSpc>
-              <a:tabLst>
-                <a:tab algn="l" pos="0"/>
-              </a:tabLst>
-            </a:pPr>
-            <a:r>
-              <a:rPr b="0" lang="en-US" sz="1800" spc="108" strike="noStrike" u="none">
-                <a:solidFill>
-                  <a:srgbClr val="6b6b75"/>
-                </a:solidFill>
-                <a:effectLst/>
-                <a:uFillTx/>
-                <a:latin typeface="Arial"/>
-                <a:ea typeface="Arial"/>
-              </a:rPr>
-              <a:t>RESULTS · RATES</a:t>
-            </a:r>
-            <a:endParaRPr b="0" lang="en-US" sz="1800" strike="noStrike" u="none">
-              <a:solidFill>
-                <a:srgbClr val="000000"/>
-              </a:solidFill>
-              <a:effectLst/>
-              <a:uFillTx/>
-              <a:latin typeface="Arial"/>
-            </a:endParaRPr>
-          </a:p>
-        </p:txBody>
-      </p:sp>
-      <p:sp>
-        <p:nvSpPr>
-          <p:cNvPr id="188" name="Text 18"/>
+          <p:cNvPr id="189" name="Text 18"/>
           <p:cNvSpPr/>
           <p:nvPr/>
         </p:nvSpPr>
         <p:spPr>
           <a:xfrm>
             <a:off x="16279200" y="9496440"/>
-            <a:ext cx="1132200" cy="333000"/>
+            <a:ext cx="1131840" cy="332640"/>
           </a:xfrm>
           <a:prstGeom prst="rect">
             <a:avLst/>
@@ -5899,14 +6067,14 @@
       </p:grpSpPr>
       <p:sp>
         <p:nvSpPr>
-          <p:cNvPr id="189" name="Text 0"/>
+          <p:cNvPr id="190" name="Text 0"/>
           <p:cNvSpPr/>
           <p:nvPr/>
         </p:nvSpPr>
         <p:spPr>
           <a:xfrm>
             <a:off x="952560" y="457200"/>
-            <a:ext cx="1820880" cy="333000"/>
+            <a:ext cx="1820520" cy="332640"/>
           </a:xfrm>
           <a:prstGeom prst="rect">
             <a:avLst/>
@@ -5960,14 +6128,14 @@
       </p:sp>
       <p:sp>
         <p:nvSpPr>
-          <p:cNvPr id="190" name="Text 1"/>
+          <p:cNvPr id="191" name="Text 1"/>
           <p:cNvSpPr/>
           <p:nvPr/>
         </p:nvSpPr>
         <p:spPr>
           <a:xfrm>
             <a:off x="16247160" y="457200"/>
-            <a:ext cx="1164240" cy="333000"/>
+            <a:ext cx="1163880" cy="332640"/>
           </a:xfrm>
           <a:prstGeom prst="rect">
             <a:avLst/>
@@ -6021,14 +6189,14 @@
       </p:sp>
       <p:sp>
         <p:nvSpPr>
-          <p:cNvPr id="191" name="Text 2"/>
+          <p:cNvPr id="192" name="Text 2"/>
           <p:cNvSpPr/>
           <p:nvPr/>
         </p:nvSpPr>
         <p:spPr>
           <a:xfrm>
             <a:off x="952560" y="1047600"/>
-            <a:ext cx="16874280" cy="333000"/>
+            <a:ext cx="16873920" cy="332640"/>
           </a:xfrm>
           <a:prstGeom prst="rect">
             <a:avLst/>
@@ -6082,14 +6250,14 @@
       </p:sp>
       <p:sp>
         <p:nvSpPr>
-          <p:cNvPr id="192" name="Text 3"/>
+          <p:cNvPr id="193" name="Text 3"/>
           <p:cNvSpPr/>
           <p:nvPr/>
         </p:nvSpPr>
         <p:spPr>
           <a:xfrm>
             <a:off x="952560" y="1685880"/>
-            <a:ext cx="16678080" cy="1557720"/>
+            <a:ext cx="16677720" cy="1557360"/>
           </a:xfrm>
           <a:prstGeom prst="rect">
             <a:avLst/>
@@ -6143,14 +6311,14 @@
       </p:sp>
       <p:sp>
         <p:nvSpPr>
-          <p:cNvPr id="193" name="Text 4"/>
+          <p:cNvPr id="194" name="Text 4"/>
           <p:cNvSpPr/>
           <p:nvPr/>
         </p:nvSpPr>
         <p:spPr>
           <a:xfrm>
             <a:off x="952560" y="3739320"/>
-            <a:ext cx="8093520" cy="397800"/>
+            <a:ext cx="8093160" cy="397440"/>
           </a:xfrm>
           <a:prstGeom prst="rect">
             <a:avLst/>
@@ -6204,14 +6372,14 @@
       </p:sp>
       <p:sp>
         <p:nvSpPr>
-          <p:cNvPr id="194" name="Text 5"/>
+          <p:cNvPr id="195" name="Text 5"/>
           <p:cNvSpPr/>
           <p:nvPr/>
         </p:nvSpPr>
         <p:spPr>
           <a:xfrm>
             <a:off x="952560" y="4232880"/>
-            <a:ext cx="8093520" cy="2064240"/>
+            <a:ext cx="8093160" cy="2063880"/>
           </a:xfrm>
           <a:prstGeom prst="rect">
             <a:avLst/>
@@ -6265,14 +6433,14 @@
       </p:sp>
       <p:sp>
         <p:nvSpPr>
-          <p:cNvPr id="195" name="Text 6"/>
+          <p:cNvPr id="196" name="Text 6"/>
           <p:cNvSpPr/>
           <p:nvPr/>
         </p:nvSpPr>
         <p:spPr>
           <a:xfrm>
             <a:off x="9477360" y="3739320"/>
-            <a:ext cx="8093520" cy="397800"/>
+            <a:ext cx="8093160" cy="397440"/>
           </a:xfrm>
           <a:prstGeom prst="rect">
             <a:avLst/>
@@ -6326,14 +6494,14 @@
       </p:sp>
       <p:sp>
         <p:nvSpPr>
-          <p:cNvPr id="196" name="Text 7"/>
+          <p:cNvPr id="197" name="Text 7"/>
           <p:cNvSpPr/>
           <p:nvPr/>
         </p:nvSpPr>
         <p:spPr>
           <a:xfrm>
             <a:off x="9477360" y="4232880"/>
-            <a:ext cx="8093520" cy="2570760"/>
+            <a:ext cx="8093160" cy="2570400"/>
           </a:xfrm>
           <a:prstGeom prst="rect">
             <a:avLst/>
@@ -6387,14 +6555,14 @@
       </p:sp>
       <p:sp>
         <p:nvSpPr>
-          <p:cNvPr id="197" name="Text 8"/>
+          <p:cNvPr id="198" name="Text 8"/>
           <p:cNvSpPr/>
           <p:nvPr/>
         </p:nvSpPr>
         <p:spPr>
           <a:xfrm>
             <a:off x="1324080" y="7413480"/>
-            <a:ext cx="16491600" cy="1557720"/>
+            <a:ext cx="16491240" cy="1557360"/>
           </a:xfrm>
           <a:prstGeom prst="rect">
             <a:avLst/>
@@ -6460,14 +6628,14 @@
       </p:sp>
       <p:sp>
         <p:nvSpPr>
-          <p:cNvPr id="198" name="Text 9"/>
+          <p:cNvPr id="199" name="Text 9"/>
           <p:cNvSpPr/>
           <p:nvPr/>
         </p:nvSpPr>
         <p:spPr>
           <a:xfrm>
             <a:off x="952560" y="9496440"/>
-            <a:ext cx="1584720" cy="333000"/>
+            <a:ext cx="1584360" cy="332640"/>
           </a:xfrm>
           <a:prstGeom prst="rect">
             <a:avLst/>
@@ -6521,14 +6689,14 @@
       </p:sp>
       <p:sp>
         <p:nvSpPr>
-          <p:cNvPr id="199" name="Text 10"/>
+          <p:cNvPr id="200" name="Text 10"/>
           <p:cNvSpPr/>
           <p:nvPr/>
         </p:nvSpPr>
         <p:spPr>
           <a:xfrm>
             <a:off x="16279200" y="9496440"/>
-            <a:ext cx="1132200" cy="333000"/>
+            <a:ext cx="1131840" cy="332640"/>
           </a:xfrm>
           <a:prstGeom prst="rect">
             <a:avLst/>
@@ -6612,14 +6780,14 @@
       </p:grpSpPr>
       <p:sp>
         <p:nvSpPr>
-          <p:cNvPr id="200" name=""/>
+          <p:cNvPr id="201" name=""/>
           <p:cNvSpPr/>
           <p:nvPr/>
         </p:nvSpPr>
         <p:spPr>
           <a:xfrm>
             <a:off x="0" y="0"/>
-            <a:ext cx="18288000" cy="10287000"/>
+            <a:ext cx="18287640" cy="10286640"/>
           </a:xfrm>
           <a:prstGeom prst="rect">
             <a:avLst/>
@@ -6644,6 +6812,11 @@
             <a:noAutofit/>
           </a:bodyPr>
           <a:p>
+            <a:pPr>
+              <a:lnSpc>
+                <a:spcPct val="100000"/>
+              </a:lnSpc>
+            </a:pPr>
             <a:endParaRPr b="0" lang="en-US" sz="1800" strike="noStrike" u="none">
               <a:solidFill>
                 <a:srgbClr val="ffffff"/>
@@ -6657,14 +6830,14 @@
       </p:sp>
       <p:sp>
         <p:nvSpPr>
-          <p:cNvPr id="201" name="Text 0"/>
+          <p:cNvPr id="202" name="Text 0"/>
           <p:cNvSpPr/>
           <p:nvPr/>
         </p:nvSpPr>
         <p:spPr>
           <a:xfrm>
             <a:off x="952560" y="457200"/>
-            <a:ext cx="1820880" cy="333000"/>
+            <a:ext cx="1820520" cy="332640"/>
           </a:xfrm>
           <a:prstGeom prst="rect">
             <a:avLst/>
@@ -6720,14 +6893,14 @@
       </p:sp>
       <p:sp>
         <p:nvSpPr>
-          <p:cNvPr id="202" name="Text 1"/>
+          <p:cNvPr id="203" name="Text 1"/>
           <p:cNvSpPr/>
           <p:nvPr/>
         </p:nvSpPr>
         <p:spPr>
           <a:xfrm>
             <a:off x="16247160" y="457200"/>
-            <a:ext cx="1164240" cy="333000"/>
+            <a:ext cx="1163880" cy="332640"/>
           </a:xfrm>
           <a:prstGeom prst="rect">
             <a:avLst/>
@@ -6783,14 +6956,14 @@
       </p:sp>
       <p:sp>
         <p:nvSpPr>
-          <p:cNvPr id="203" name="Shape 2"/>
+          <p:cNvPr id="204" name="Shape 2"/>
           <p:cNvSpPr/>
           <p:nvPr/>
         </p:nvSpPr>
         <p:spPr>
           <a:xfrm>
             <a:off x="952560" y="2430000"/>
-            <a:ext cx="2091240" cy="504360"/>
+            <a:ext cx="2090880" cy="504000"/>
           </a:xfrm>
           <a:prstGeom prst="roundRect">
             <a:avLst>
@@ -6816,6 +6989,11 @@
             <a:noAutofit/>
           </a:bodyPr>
           <a:p>
+            <a:pPr>
+              <a:lnSpc>
+                <a:spcPct val="100000"/>
+              </a:lnSpc>
+            </a:pPr>
             <a:endParaRPr b="0" lang="en-US" sz="1800" strike="noStrike" u="none">
               <a:solidFill>
                 <a:srgbClr val="000000"/>
@@ -6829,14 +7007,14 @@
       </p:sp>
       <p:sp>
         <p:nvSpPr>
-          <p:cNvPr id="204" name="Text 3"/>
+          <p:cNvPr id="205" name="Text 3"/>
           <p:cNvSpPr/>
           <p:nvPr/>
         </p:nvSpPr>
         <p:spPr>
           <a:xfrm>
             <a:off x="1152360" y="2534760"/>
-            <a:ext cx="1767600" cy="333000"/>
+            <a:ext cx="1767240" cy="332640"/>
           </a:xfrm>
           <a:prstGeom prst="rect">
             <a:avLst/>
@@ -6890,14 +7068,14 @@
       </p:sp>
       <p:sp>
         <p:nvSpPr>
-          <p:cNvPr id="205" name="Text 4"/>
+          <p:cNvPr id="206" name="Text 4"/>
           <p:cNvSpPr/>
           <p:nvPr/>
         </p:nvSpPr>
         <p:spPr>
           <a:xfrm>
             <a:off x="952560" y="3277800"/>
-            <a:ext cx="16678080" cy="2403720"/>
+            <a:ext cx="16677720" cy="2403360"/>
           </a:xfrm>
           <a:prstGeom prst="rect">
             <a:avLst/>
@@ -6951,14 +7129,14 @@
       </p:sp>
       <p:sp>
         <p:nvSpPr>
-          <p:cNvPr id="206" name="Shape 5"/>
+          <p:cNvPr id="207" name="Shape 5"/>
           <p:cNvSpPr/>
           <p:nvPr/>
         </p:nvSpPr>
         <p:spPr>
           <a:xfrm>
             <a:off x="952560" y="6253200"/>
-            <a:ext cx="3428640" cy="9000"/>
+            <a:ext cx="3428280" cy="8640"/>
           </a:xfrm>
           <a:prstGeom prst="rect">
             <a:avLst/>
@@ -6983,6 +7161,11 @@
             <a:noAutofit/>
           </a:bodyPr>
           <a:p>
+            <a:pPr>
+              <a:lnSpc>
+                <a:spcPct val="100000"/>
+              </a:lnSpc>
+            </a:pPr>
             <a:endParaRPr b="0" lang="en-US" sz="1800" strike="noStrike" u="none">
               <a:solidFill>
                 <a:srgbClr val="000000"/>
@@ -6996,14 +7179,14 @@
       </p:sp>
       <p:sp>
         <p:nvSpPr>
-          <p:cNvPr id="207" name="Text 6"/>
+          <p:cNvPr id="208" name="Text 6"/>
           <p:cNvSpPr/>
           <p:nvPr/>
         </p:nvSpPr>
         <p:spPr>
           <a:xfrm>
             <a:off x="952560" y="6453360"/>
-            <a:ext cx="16874280" cy="333000"/>
+            <a:ext cx="16873920" cy="332640"/>
           </a:xfrm>
           <a:prstGeom prst="rect">
             <a:avLst/>
@@ -7059,14 +7242,14 @@
       </p:sp>
       <p:sp>
         <p:nvSpPr>
-          <p:cNvPr id="208" name="Text 7"/>
+          <p:cNvPr id="209" name="Text 7"/>
           <p:cNvSpPr/>
           <p:nvPr/>
         </p:nvSpPr>
         <p:spPr>
           <a:xfrm>
             <a:off x="952560" y="6843600"/>
-            <a:ext cx="15696720" cy="1050840"/>
+            <a:ext cx="15696360" cy="1050480"/>
           </a:xfrm>
           <a:prstGeom prst="rect">
             <a:avLst/>
@@ -7120,14 +7303,14 @@
       </p:sp>
       <p:sp>
         <p:nvSpPr>
-          <p:cNvPr id="209" name="Text 8"/>
+          <p:cNvPr id="210" name="Text 8"/>
           <p:cNvSpPr/>
           <p:nvPr/>
         </p:nvSpPr>
         <p:spPr>
           <a:xfrm>
             <a:off x="952560" y="9496440"/>
-            <a:ext cx="1584720" cy="333000"/>
+            <a:ext cx="1584360" cy="332640"/>
           </a:xfrm>
           <a:prstGeom prst="rect">
             <a:avLst/>
@@ -7183,14 +7366,14 @@
       </p:sp>
       <p:sp>
         <p:nvSpPr>
-          <p:cNvPr id="210" name="Text 9"/>
+          <p:cNvPr id="211" name="Text 9"/>
           <p:cNvSpPr/>
           <p:nvPr/>
         </p:nvSpPr>
         <p:spPr>
           <a:xfrm>
             <a:off x="16279200" y="9496440"/>
-            <a:ext cx="1132200" cy="333000"/>
+            <a:ext cx="1131840" cy="332640"/>
           </a:xfrm>
           <a:prstGeom prst="rect">
             <a:avLst/>
@@ -7283,14 +7466,14 @@
       </p:grpSpPr>
       <p:sp>
         <p:nvSpPr>
-          <p:cNvPr id="211" name="Text 0"/>
+          <p:cNvPr id="212" name="Text 0"/>
           <p:cNvSpPr/>
           <p:nvPr/>
         </p:nvSpPr>
         <p:spPr>
           <a:xfrm>
             <a:off x="952560" y="457200"/>
-            <a:ext cx="732600" cy="333000"/>
+            <a:ext cx="732240" cy="332640"/>
           </a:xfrm>
           <a:prstGeom prst="rect">
             <a:avLst/>
@@ -7346,14 +7529,14 @@
       </p:sp>
       <p:sp>
         <p:nvSpPr>
-          <p:cNvPr id="212" name="Text 1"/>
+          <p:cNvPr id="213" name="Text 1"/>
           <p:cNvSpPr/>
           <p:nvPr/>
         </p:nvSpPr>
         <p:spPr>
           <a:xfrm>
             <a:off x="16247160" y="457200"/>
-            <a:ext cx="1164240" cy="333000"/>
+            <a:ext cx="1163880" cy="332640"/>
           </a:xfrm>
           <a:prstGeom prst="rect">
             <a:avLst/>
@@ -7409,14 +7592,14 @@
       </p:sp>
       <p:sp>
         <p:nvSpPr>
-          <p:cNvPr id="213" name="Text 2"/>
+          <p:cNvPr id="214" name="Text 2"/>
           <p:cNvSpPr/>
           <p:nvPr/>
         </p:nvSpPr>
         <p:spPr>
           <a:xfrm>
             <a:off x="952560" y="3027240"/>
-            <a:ext cx="16874280" cy="333000"/>
+            <a:ext cx="16873920" cy="332640"/>
           </a:xfrm>
           <a:prstGeom prst="rect">
             <a:avLst/>
@@ -7470,14 +7653,14 @@
       </p:sp>
       <p:sp>
         <p:nvSpPr>
-          <p:cNvPr id="214" name="Text 3"/>
+          <p:cNvPr id="215" name="Text 3"/>
           <p:cNvSpPr/>
           <p:nvPr/>
         </p:nvSpPr>
         <p:spPr>
           <a:xfrm>
             <a:off x="952560" y="3665160"/>
-            <a:ext cx="16874280" cy="1847520"/>
+            <a:ext cx="16873920" cy="1847160"/>
           </a:xfrm>
           <a:prstGeom prst="rect">
             <a:avLst/>
@@ -7531,14 +7714,14 @@
       </p:sp>
       <p:sp>
         <p:nvSpPr>
-          <p:cNvPr id="215" name="Shape 4"/>
+          <p:cNvPr id="216" name="Shape 4"/>
           <p:cNvSpPr/>
           <p:nvPr/>
         </p:nvSpPr>
         <p:spPr>
           <a:xfrm>
             <a:off x="952560" y="6008400"/>
-            <a:ext cx="3428640" cy="9000"/>
+            <a:ext cx="3428280" cy="8640"/>
           </a:xfrm>
           <a:prstGeom prst="rect">
             <a:avLst/>
@@ -7563,6 +7746,11 @@
             <a:noAutofit/>
           </a:bodyPr>
           <a:p>
+            <a:pPr>
+              <a:lnSpc>
+                <a:spcPct val="100000"/>
+              </a:lnSpc>
+            </a:pPr>
             <a:endParaRPr b="0" lang="en-US" sz="1800" strike="noStrike" u="none">
               <a:solidFill>
                 <a:srgbClr val="000000"/>
@@ -7576,14 +7764,14 @@
       </p:sp>
       <p:sp>
         <p:nvSpPr>
-          <p:cNvPr id="216" name="Text 5"/>
+          <p:cNvPr id="217" name="Text 5"/>
           <p:cNvSpPr/>
           <p:nvPr/>
         </p:nvSpPr>
         <p:spPr>
           <a:xfrm>
             <a:off x="952560" y="6246720"/>
-            <a:ext cx="13734720" cy="1050840"/>
+            <a:ext cx="13734360" cy="1050480"/>
           </a:xfrm>
           <a:prstGeom prst="rect">
             <a:avLst/>
@@ -7639,14 +7827,14 @@
       </p:sp>
       <p:sp>
         <p:nvSpPr>
-          <p:cNvPr id="217" name="Text 6"/>
+          <p:cNvPr id="218" name="Text 6"/>
           <p:cNvSpPr/>
           <p:nvPr/>
         </p:nvSpPr>
         <p:spPr>
           <a:xfrm>
             <a:off x="952560" y="9496440"/>
-            <a:ext cx="528480" cy="333000"/>
+            <a:ext cx="528120" cy="332640"/>
           </a:xfrm>
           <a:prstGeom prst="rect">
             <a:avLst/>
@@ -7702,14 +7890,14 @@
       </p:sp>
       <p:sp>
         <p:nvSpPr>
-          <p:cNvPr id="218" name="Text 7"/>
+          <p:cNvPr id="219" name="Text 7"/>
           <p:cNvSpPr/>
           <p:nvPr/>
         </p:nvSpPr>
         <p:spPr>
           <a:xfrm>
             <a:off x="16279200" y="9496440"/>
-            <a:ext cx="1132200" cy="333000"/>
+            <a:ext cx="1131840" cy="332640"/>
           </a:xfrm>
           <a:prstGeom prst="rect">
             <a:avLst/>
@@ -7809,7 +7997,7 @@
         <p:spPr>
           <a:xfrm>
             <a:off x="952560" y="457200"/>
-            <a:ext cx="1820880" cy="333000"/>
+            <a:ext cx="1820520" cy="332640"/>
           </a:xfrm>
           <a:prstGeom prst="rect">
             <a:avLst/>
@@ -7870,7 +8058,7 @@
         <p:spPr>
           <a:xfrm>
             <a:off x="16247160" y="457200"/>
-            <a:ext cx="1164240" cy="333000"/>
+            <a:ext cx="1163880" cy="332640"/>
           </a:xfrm>
           <a:prstGeom prst="rect">
             <a:avLst/>
@@ -7931,7 +8119,7 @@
         <p:spPr>
           <a:xfrm>
             <a:off x="952560" y="1047600"/>
-            <a:ext cx="16874280" cy="333000"/>
+            <a:ext cx="16873920" cy="332640"/>
           </a:xfrm>
           <a:prstGeom prst="rect">
             <a:avLst/>
@@ -7992,7 +8180,7 @@
         <p:spPr>
           <a:xfrm>
             <a:off x="952560" y="1685880"/>
-            <a:ext cx="15696720" cy="797760"/>
+            <a:ext cx="15696360" cy="797400"/>
           </a:xfrm>
           <a:prstGeom prst="rect">
             <a:avLst/>
@@ -8053,7 +8241,7 @@
         <p:spPr>
           <a:xfrm>
             <a:off x="952560" y="2979360"/>
-            <a:ext cx="14715720" cy="1557720"/>
+            <a:ext cx="14715360" cy="1557360"/>
           </a:xfrm>
           <a:prstGeom prst="rect">
             <a:avLst/>
@@ -8114,7 +8302,7 @@
         <p:spPr>
           <a:xfrm>
             <a:off x="952560" y="4880160"/>
-            <a:ext cx="14715720" cy="1050840"/>
+            <a:ext cx="14715360" cy="1050480"/>
           </a:xfrm>
           <a:prstGeom prst="rect">
             <a:avLst/>
@@ -8175,7 +8363,7 @@
         <p:spPr>
           <a:xfrm>
             <a:off x="1324080" y="6541200"/>
-            <a:ext cx="14715720" cy="544320"/>
+            <a:ext cx="14715360" cy="543960"/>
           </a:xfrm>
           <a:prstGeom prst="rect">
             <a:avLst/>
@@ -8236,7 +8424,7 @@
         <p:spPr>
           <a:xfrm>
             <a:off x="952560" y="9496440"/>
-            <a:ext cx="1584720" cy="333000"/>
+            <a:ext cx="1584360" cy="332640"/>
           </a:xfrm>
           <a:prstGeom prst="rect">
             <a:avLst/>
@@ -8297,7 +8485,7 @@
         <p:spPr>
           <a:xfrm>
             <a:off x="16279200" y="9496440"/>
-            <a:ext cx="1132200" cy="333000"/>
+            <a:ext cx="1131840" cy="332640"/>
           </a:xfrm>
           <a:prstGeom prst="rect">
             <a:avLst/>
@@ -8395,7 +8583,7 @@
         <p:spPr>
           <a:xfrm>
             <a:off x="952560" y="457200"/>
-            <a:ext cx="1820880" cy="333000"/>
+            <a:ext cx="1820520" cy="332640"/>
           </a:xfrm>
           <a:prstGeom prst="rect">
             <a:avLst/>
@@ -8456,7 +8644,7 @@
         <p:spPr>
           <a:xfrm>
             <a:off x="16247160" y="457200"/>
-            <a:ext cx="1164240" cy="333000"/>
+            <a:ext cx="1163880" cy="332640"/>
           </a:xfrm>
           <a:prstGeom prst="rect">
             <a:avLst/>
@@ -8517,7 +8705,7 @@
         <p:spPr>
           <a:xfrm>
             <a:off x="952560" y="1047600"/>
-            <a:ext cx="16874280" cy="333000"/>
+            <a:ext cx="16873920" cy="332640"/>
           </a:xfrm>
           <a:prstGeom prst="rect">
             <a:avLst/>
@@ -8578,7 +8766,7 @@
         <p:spPr>
           <a:xfrm>
             <a:off x="952560" y="1685880"/>
-            <a:ext cx="15696720" cy="1378800"/>
+            <a:ext cx="15696360" cy="1378440"/>
           </a:xfrm>
           <a:prstGeom prst="rect">
             <a:avLst/>
@@ -8639,7 +8827,7 @@
         <p:spPr>
           <a:xfrm>
             <a:off x="952560" y="3789000"/>
-            <a:ext cx="5310360" cy="571320"/>
+            <a:ext cx="5310000" cy="570960"/>
           </a:xfrm>
           <a:prstGeom prst="rect">
             <a:avLst/>
@@ -8700,7 +8888,7 @@
         <p:spPr>
           <a:xfrm>
             <a:off x="952560" y="4474800"/>
-            <a:ext cx="5310360" cy="1557720"/>
+            <a:ext cx="5310000" cy="1557360"/>
           </a:xfrm>
           <a:prstGeom prst="rect">
             <a:avLst/>
@@ -8761,7 +8949,7 @@
         <p:spPr>
           <a:xfrm>
             <a:off x="6565680" y="3789000"/>
-            <a:ext cx="5310360" cy="571320"/>
+            <a:ext cx="5310000" cy="570960"/>
           </a:xfrm>
           <a:prstGeom prst="rect">
             <a:avLst/>
@@ -8822,7 +9010,7 @@
         <p:spPr>
           <a:xfrm>
             <a:off x="6565680" y="4474800"/>
-            <a:ext cx="5310360" cy="1557720"/>
+            <a:ext cx="5310000" cy="1557360"/>
           </a:xfrm>
           <a:prstGeom prst="rect">
             <a:avLst/>
@@ -8907,7 +9095,7 @@
         <p:spPr>
           <a:xfrm>
             <a:off x="12179160" y="3789000"/>
-            <a:ext cx="5310360" cy="571320"/>
+            <a:ext cx="5310000" cy="570960"/>
           </a:xfrm>
           <a:prstGeom prst="rect">
             <a:avLst/>
@@ -8968,7 +9156,7 @@
         <p:spPr>
           <a:xfrm>
             <a:off x="12179160" y="4474800"/>
-            <a:ext cx="5310360" cy="1557720"/>
+            <a:ext cx="5310000" cy="1557360"/>
           </a:xfrm>
           <a:prstGeom prst="rect">
             <a:avLst/>
@@ -9029,7 +9217,7 @@
         <p:spPr>
           <a:xfrm>
             <a:off x="952560" y="9496440"/>
-            <a:ext cx="1584720" cy="333000"/>
+            <a:ext cx="1584360" cy="332640"/>
           </a:xfrm>
           <a:prstGeom prst="rect">
             <a:avLst/>
@@ -9090,7 +9278,7 @@
         <p:spPr>
           <a:xfrm>
             <a:off x="16279200" y="9496440"/>
-            <a:ext cx="1132200" cy="333000"/>
+            <a:ext cx="1131840" cy="332640"/>
           </a:xfrm>
           <a:prstGeom prst="rect">
             <a:avLst/>
@@ -9188,7 +9376,7 @@
         <p:spPr>
           <a:xfrm>
             <a:off x="952560" y="457200"/>
-            <a:ext cx="1820880" cy="333000"/>
+            <a:ext cx="1820520" cy="332640"/>
           </a:xfrm>
           <a:prstGeom prst="rect">
             <a:avLst/>
@@ -9249,7 +9437,7 @@
         <p:spPr>
           <a:xfrm>
             <a:off x="16247160" y="457200"/>
-            <a:ext cx="1164240" cy="333000"/>
+            <a:ext cx="1163880" cy="332640"/>
           </a:xfrm>
           <a:prstGeom prst="rect">
             <a:avLst/>
@@ -9310,7 +9498,7 @@
         <p:spPr>
           <a:xfrm>
             <a:off x="952560" y="1047600"/>
-            <a:ext cx="16874280" cy="333000"/>
+            <a:ext cx="16873920" cy="332640"/>
           </a:xfrm>
           <a:prstGeom prst="rect">
             <a:avLst/>
@@ -9371,7 +9559,7 @@
         <p:spPr>
           <a:xfrm>
             <a:off x="952560" y="1685880"/>
-            <a:ext cx="16678080" cy="708120"/>
+            <a:ext cx="16677720" cy="707760"/>
           </a:xfrm>
           <a:prstGeom prst="rect">
             <a:avLst/>
@@ -9432,7 +9620,7 @@
         <p:spPr>
           <a:xfrm>
             <a:off x="952560" y="3270960"/>
-            <a:ext cx="8093520" cy="397800"/>
+            <a:ext cx="8093160" cy="397440"/>
           </a:xfrm>
           <a:prstGeom prst="rect">
             <a:avLst/>
@@ -9493,7 +9681,7 @@
         <p:spPr>
           <a:xfrm>
             <a:off x="952560" y="3821400"/>
-            <a:ext cx="8093520" cy="1446480"/>
+            <a:ext cx="8093160" cy="1446120"/>
           </a:xfrm>
           <a:prstGeom prst="rect">
             <a:avLst/>
@@ -9554,7 +9742,7 @@
         <p:spPr>
           <a:xfrm>
             <a:off x="952560" y="5496840"/>
-            <a:ext cx="8093520" cy="1446480"/>
+            <a:ext cx="8093160" cy="1446120"/>
           </a:xfrm>
           <a:prstGeom prst="rect">
             <a:avLst/>
@@ -9639,7 +9827,7 @@
         <p:spPr>
           <a:xfrm>
             <a:off x="9477360" y="3270960"/>
-            <a:ext cx="8093520" cy="397800"/>
+            <a:ext cx="8093160" cy="397440"/>
           </a:xfrm>
           <a:prstGeom prst="rect">
             <a:avLst/>
@@ -9700,7 +9888,7 @@
         <p:spPr>
           <a:xfrm>
             <a:off x="9477360" y="3821400"/>
-            <a:ext cx="8093520" cy="1446480"/>
+            <a:ext cx="8093160" cy="1446120"/>
           </a:xfrm>
           <a:prstGeom prst="rect">
             <a:avLst/>
@@ -9809,7 +9997,7 @@
         <p:spPr>
           <a:xfrm>
             <a:off x="9477360" y="5496840"/>
-            <a:ext cx="8093520" cy="1915920"/>
+            <a:ext cx="8093160" cy="1915560"/>
           </a:xfrm>
           <a:prstGeom prst="rect">
             <a:avLst/>
@@ -9870,7 +10058,7 @@
         <p:spPr>
           <a:xfrm>
             <a:off x="952560" y="9496440"/>
-            <a:ext cx="4195440" cy="333000"/>
+            <a:ext cx="4195080" cy="332640"/>
           </a:xfrm>
           <a:prstGeom prst="rect">
             <a:avLst/>
@@ -9931,7 +10119,7 @@
         <p:spPr>
           <a:xfrm>
             <a:off x="16279200" y="9496440"/>
-            <a:ext cx="1132200" cy="333000"/>
+            <a:ext cx="1131840" cy="332640"/>
           </a:xfrm>
           <a:prstGeom prst="rect">
             <a:avLst/>
@@ -10029,7 +10217,7 @@
         <p:spPr>
           <a:xfrm>
             <a:off x="952560" y="457200"/>
-            <a:ext cx="1820880" cy="333000"/>
+            <a:ext cx="1820520" cy="332640"/>
           </a:xfrm>
           <a:prstGeom prst="rect">
             <a:avLst/>
@@ -10090,7 +10278,7 @@
         <p:spPr>
           <a:xfrm>
             <a:off x="16247160" y="457200"/>
-            <a:ext cx="1164240" cy="333000"/>
+            <a:ext cx="1163880" cy="332640"/>
           </a:xfrm>
           <a:prstGeom prst="rect">
             <a:avLst/>
@@ -10151,7 +10339,7 @@
         <p:spPr>
           <a:xfrm>
             <a:off x="952560" y="1047600"/>
-            <a:ext cx="16874280" cy="333000"/>
+            <a:ext cx="16873920" cy="332640"/>
           </a:xfrm>
           <a:prstGeom prst="rect">
             <a:avLst/>
@@ -10212,7 +10400,7 @@
         <p:spPr>
           <a:xfrm>
             <a:off x="952560" y="1685880"/>
-            <a:ext cx="16678080" cy="1378800"/>
+            <a:ext cx="16677720" cy="1378440"/>
           </a:xfrm>
           <a:prstGeom prst="rect">
             <a:avLst/>
@@ -10273,7 +10461,7 @@
         <p:spPr>
           <a:xfrm>
             <a:off x="952560" y="3712680"/>
-            <a:ext cx="8044560" cy="397800"/>
+            <a:ext cx="8044200" cy="397440"/>
           </a:xfrm>
           <a:prstGeom prst="rect">
             <a:avLst/>
@@ -10334,7 +10522,7 @@
         <p:spPr>
           <a:xfrm>
             <a:off x="952560" y="4263120"/>
-            <a:ext cx="8044560" cy="544320"/>
+            <a:ext cx="8044200" cy="543960"/>
           </a:xfrm>
           <a:prstGeom prst="rect">
             <a:avLst/>
@@ -10419,7 +10607,7 @@
         <p:spPr>
           <a:xfrm>
             <a:off x="952560" y="4998240"/>
-            <a:ext cx="8044560" cy="1050840"/>
+            <a:ext cx="8044200" cy="1050480"/>
           </a:xfrm>
           <a:prstGeom prst="rect">
             <a:avLst/>
@@ -10504,7 +10692,7 @@
         <p:spPr>
           <a:xfrm>
             <a:off x="952560" y="6240240"/>
-            <a:ext cx="8044560" cy="544320"/>
+            <a:ext cx="8044200" cy="543960"/>
           </a:xfrm>
           <a:prstGeom prst="rect">
             <a:avLst/>
@@ -10565,7 +10753,7 @@
         <p:spPr>
           <a:xfrm>
             <a:off x="9524880" y="3712680"/>
-            <a:ext cx="8044560" cy="397800"/>
+            <a:ext cx="8044200" cy="397440"/>
           </a:xfrm>
           <a:prstGeom prst="rect">
             <a:avLst/>
@@ -10626,7 +10814,7 @@
         <p:spPr>
           <a:xfrm>
             <a:off x="9524880" y="4263120"/>
-            <a:ext cx="8044560" cy="544320"/>
+            <a:ext cx="8044200" cy="543960"/>
           </a:xfrm>
           <a:prstGeom prst="rect">
             <a:avLst/>
@@ -10687,7 +10875,7 @@
         <p:spPr>
           <a:xfrm>
             <a:off x="9524880" y="4998240"/>
-            <a:ext cx="8044560" cy="1050840"/>
+            <a:ext cx="8044200" cy="1050480"/>
           </a:xfrm>
           <a:prstGeom prst="rect">
             <a:avLst/>
@@ -10772,7 +10960,7 @@
         <p:spPr>
           <a:xfrm>
             <a:off x="9524880" y="6240240"/>
-            <a:ext cx="8044560" cy="544320"/>
+            <a:ext cx="8044200" cy="543960"/>
           </a:xfrm>
           <a:prstGeom prst="rect">
             <a:avLst/>
@@ -10833,7 +11021,7 @@
         <p:spPr>
           <a:xfrm>
             <a:off x="952560" y="7128000"/>
-            <a:ext cx="16382520" cy="9000"/>
+            <a:ext cx="16382160" cy="8640"/>
           </a:xfrm>
           <a:prstGeom prst="rect">
             <a:avLst/>
@@ -10856,6 +11044,11 @@
             <a:noAutofit/>
           </a:bodyPr>
           <a:p>
+            <a:pPr>
+              <a:lnSpc>
+                <a:spcPct val="100000"/>
+              </a:lnSpc>
+            </a:pPr>
             <a:endParaRPr b="0" lang="en-US" sz="1800" strike="noStrike" u="none">
               <a:solidFill>
                 <a:srgbClr val="000000"/>
@@ -10876,7 +11069,7 @@
         <p:spPr>
           <a:xfrm>
             <a:off x="952560" y="7308720"/>
-            <a:ext cx="16874280" cy="397800"/>
+            <a:ext cx="16873920" cy="397440"/>
           </a:xfrm>
           <a:prstGeom prst="rect">
             <a:avLst/>
@@ -10937,7 +11130,7 @@
         <p:spPr>
           <a:xfrm>
             <a:off x="952560" y="9496440"/>
-            <a:ext cx="3263040" cy="333000"/>
+            <a:ext cx="3262680" cy="332640"/>
           </a:xfrm>
           <a:prstGeom prst="rect">
             <a:avLst/>
@@ -10998,7 +11191,7 @@
         <p:spPr>
           <a:xfrm>
             <a:off x="16279200" y="9496440"/>
-            <a:ext cx="1132200" cy="333000"/>
+            <a:ext cx="1131840" cy="332640"/>
           </a:xfrm>
           <a:prstGeom prst="rect">
             <a:avLst/>
@@ -11089,7 +11282,7 @@
         <p:spPr>
           <a:xfrm>
             <a:off x="0" y="0"/>
-            <a:ext cx="18288000" cy="10287000"/>
+            <a:ext cx="18287640" cy="10286640"/>
           </a:xfrm>
           <a:prstGeom prst="rect">
             <a:avLst/>
@@ -11114,6 +11307,11 @@
             <a:noAutofit/>
           </a:bodyPr>
           <a:p>
+            <a:pPr>
+              <a:lnSpc>
+                <a:spcPct val="100000"/>
+              </a:lnSpc>
+            </a:pPr>
             <a:endParaRPr b="0" lang="en-US" sz="1800" strike="noStrike" u="none">
               <a:solidFill>
                 <a:srgbClr val="ffffff"/>
@@ -11134,7 +11332,7 @@
         <p:spPr>
           <a:xfrm>
             <a:off x="952560" y="457200"/>
-            <a:ext cx="2917800" cy="333000"/>
+            <a:ext cx="2917440" cy="332640"/>
           </a:xfrm>
           <a:prstGeom prst="rect">
             <a:avLst/>
@@ -11197,7 +11395,7 @@
         <p:spPr>
           <a:xfrm>
             <a:off x="16247160" y="457200"/>
-            <a:ext cx="1164240" cy="333000"/>
+            <a:ext cx="1163880" cy="332640"/>
           </a:xfrm>
           <a:prstGeom prst="rect">
             <a:avLst/>
@@ -11260,7 +11458,7 @@
         <p:spPr>
           <a:xfrm>
             <a:off x="952560" y="3517560"/>
-            <a:ext cx="2429640" cy="504360"/>
+            <a:ext cx="2429280" cy="504000"/>
           </a:xfrm>
           <a:prstGeom prst="roundRect">
             <a:avLst>
@@ -11286,6 +11484,11 @@
             <a:noAutofit/>
           </a:bodyPr>
           <a:p>
+            <a:pPr>
+              <a:lnSpc>
+                <a:spcPct val="100000"/>
+              </a:lnSpc>
+            </a:pPr>
             <a:endParaRPr b="0" lang="en-US" sz="1800" strike="noStrike" u="none">
               <a:solidFill>
                 <a:srgbClr val="000000"/>
@@ -11306,7 +11509,7 @@
         <p:spPr>
           <a:xfrm>
             <a:off x="1152360" y="3622320"/>
-            <a:ext cx="2106000" cy="333000"/>
+            <a:ext cx="2105640" cy="332640"/>
           </a:xfrm>
           <a:prstGeom prst="rect">
             <a:avLst/>
@@ -11367,7 +11570,7 @@
         <p:spPr>
           <a:xfrm>
             <a:off x="952560" y="4403520"/>
-            <a:ext cx="15696720" cy="2403720"/>
+            <a:ext cx="15696360" cy="2403360"/>
           </a:xfrm>
           <a:prstGeom prst="rect">
             <a:avLst/>
@@ -11428,7 +11631,7 @@
         <p:spPr>
           <a:xfrm>
             <a:off x="952560" y="9496440"/>
-            <a:ext cx="2641320" cy="333000"/>
+            <a:ext cx="2640960" cy="332640"/>
           </a:xfrm>
           <a:prstGeom prst="rect">
             <a:avLst/>
@@ -11491,7 +11694,7 @@
         <p:spPr>
           <a:xfrm>
             <a:off x="16279200" y="9496440"/>
-            <a:ext cx="1132200" cy="333000"/>
+            <a:ext cx="1131840" cy="332640"/>
           </a:xfrm>
           <a:prstGeom prst="rect">
             <a:avLst/>
@@ -11584,14 +11787,59 @@
       </p:grpSpPr>
       <p:sp>
         <p:nvSpPr>
-          <p:cNvPr id="76" name="Text 0"/>
+          <p:cNvPr id="76" name=""/>
+          <p:cNvSpPr/>
+          <p:nvPr/>
+        </p:nvSpPr>
+        <p:spPr>
+          <a:xfrm>
+            <a:off x="7277760" y="4601160"/>
+            <a:ext cx="3466440" cy="656640"/>
+          </a:xfrm>
+          <a:prstGeom prst="rect">
+            <a:avLst/>
+          </a:prstGeom>
+          <a:solidFill>
+            <a:srgbClr val="4a886d"/>
+          </a:solidFill>
+          <a:ln w="0">
+            <a:solidFill>
+              <a:srgbClr val="3465a4"/>
+            </a:solidFill>
+          </a:ln>
+        </p:spPr>
+        <p:style>
+          <a:lnRef idx="0"/>
+          <a:fillRef idx="0"/>
+          <a:effectRef idx="0"/>
+          <a:fontRef idx="minor"/>
+        </p:style>
+        <p:txBody>
+          <a:bodyPr lIns="90000" rIns="90000" tIns="45000" bIns="45000" anchor="ctr">
+            <a:noAutofit/>
+          </a:bodyPr>
+          <a:p>
+            <a:endParaRPr b="0" lang="en-US" sz="1800" strike="noStrike" u="none">
+              <a:solidFill>
+                <a:srgbClr val="ffffff"/>
+              </a:solidFill>
+              <a:effectLst/>
+              <a:uFillTx/>
+              <a:latin typeface="Arial"/>
+            </a:endParaRPr>
+          </a:p>
+        </p:txBody>
+      </p:sp>
+      <p:sp>
+        <p:nvSpPr>
+          <p:cNvPr id="77" name="Text 0"/>
           <p:cNvSpPr/>
           <p:nvPr/>
         </p:nvSpPr>
         <p:spPr>
           <a:xfrm>
             <a:off x="952560" y="457200"/>
-            <a:ext cx="1354680" cy="333000"/>
+            <a:ext cx="1354320" cy="332640"/>
           </a:xfrm>
           <a:prstGeom prst="rect">
             <a:avLst/>
@@ -11645,14 +11893,14 @@
       </p:sp>
       <p:sp>
         <p:nvSpPr>
-          <p:cNvPr id="77" name="Text 1"/>
+          <p:cNvPr id="78" name="Text 1"/>
           <p:cNvSpPr/>
           <p:nvPr/>
         </p:nvSpPr>
         <p:spPr>
           <a:xfrm>
             <a:off x="16247160" y="457200"/>
-            <a:ext cx="1164240" cy="333000"/>
+            <a:ext cx="1163880" cy="332640"/>
           </a:xfrm>
           <a:prstGeom prst="rect">
             <a:avLst/>
@@ -11706,14 +11954,14 @@
       </p:sp>
       <p:sp>
         <p:nvSpPr>
-          <p:cNvPr id="78" name="Text 2"/>
+          <p:cNvPr id="79" name="Text 2"/>
           <p:cNvSpPr/>
           <p:nvPr/>
         </p:nvSpPr>
         <p:spPr>
           <a:xfrm>
             <a:off x="952560" y="1047600"/>
-            <a:ext cx="16874280" cy="333000"/>
+            <a:ext cx="16873920" cy="332640"/>
           </a:xfrm>
           <a:prstGeom prst="rect">
             <a:avLst/>
@@ -11767,14 +12015,14 @@
       </p:sp>
       <p:sp>
         <p:nvSpPr>
-          <p:cNvPr id="79" name="Text 3"/>
+          <p:cNvPr id="80" name="Text 3"/>
           <p:cNvSpPr/>
           <p:nvPr/>
         </p:nvSpPr>
         <p:spPr>
           <a:xfrm>
             <a:off x="952560" y="1685880"/>
-            <a:ext cx="16678080" cy="1378800"/>
+            <a:ext cx="16677720" cy="1378440"/>
           </a:xfrm>
           <a:prstGeom prst="rect">
             <a:avLst/>
@@ -11828,14 +12076,14 @@
       </p:sp>
       <p:sp>
         <p:nvSpPr>
-          <p:cNvPr id="80" name="Text 4"/>
+          <p:cNvPr id="81" name="Text 4"/>
           <p:cNvSpPr/>
           <p:nvPr/>
         </p:nvSpPr>
         <p:spPr>
           <a:xfrm>
             <a:off x="952560" y="3593520"/>
-            <a:ext cx="2076120" cy="628200"/>
+            <a:ext cx="2075760" cy="627840"/>
           </a:xfrm>
           <a:prstGeom prst="rect">
             <a:avLst/>
@@ -11889,14 +12137,14 @@
       </p:sp>
       <p:sp>
         <p:nvSpPr>
-          <p:cNvPr id="81" name="Shape 5"/>
+          <p:cNvPr id="82" name="Shape 5"/>
           <p:cNvSpPr/>
           <p:nvPr/>
         </p:nvSpPr>
         <p:spPr>
           <a:xfrm>
             <a:off x="3086280" y="3560400"/>
-            <a:ext cx="3466800" cy="657000"/>
+            <a:ext cx="3466440" cy="656640"/>
           </a:xfrm>
           <a:prstGeom prst="rect">
             <a:avLst/>
@@ -11920,6 +12168,11 @@
             <a:noAutofit/>
           </a:bodyPr>
           <a:p>
+            <a:pPr>
+              <a:lnSpc>
+                <a:spcPct val="100000"/>
+              </a:lnSpc>
+            </a:pPr>
             <a:endParaRPr b="0" lang="en-US" sz="1800" strike="noStrike" u="none">
               <a:solidFill>
                 <a:srgbClr val="000000"/>
@@ -11933,14 +12186,14 @@
       </p:sp>
       <p:sp>
         <p:nvSpPr>
-          <p:cNvPr id="82" name="Text 6"/>
+          <p:cNvPr id="83" name="Text 6"/>
           <p:cNvSpPr/>
           <p:nvPr/>
         </p:nvSpPr>
         <p:spPr>
           <a:xfrm>
             <a:off x="3220560" y="3741120"/>
-            <a:ext cx="3197880" cy="333000"/>
+            <a:ext cx="3197520" cy="332640"/>
           </a:xfrm>
           <a:prstGeom prst="rect">
             <a:avLst/>
@@ -11994,14 +12247,14 @@
       </p:sp>
       <p:sp>
         <p:nvSpPr>
-          <p:cNvPr id="83" name="Text 7"/>
+          <p:cNvPr id="84" name="Text 7"/>
           <p:cNvSpPr/>
           <p:nvPr/>
         </p:nvSpPr>
         <p:spPr>
           <a:xfrm>
             <a:off x="6648480" y="3722040"/>
-            <a:ext cx="456840" cy="371160"/>
+            <a:ext cx="456480" cy="370800"/>
           </a:xfrm>
           <a:prstGeom prst="rect">
             <a:avLst/>
@@ -12055,14 +12308,14 @@
       </p:sp>
       <p:sp>
         <p:nvSpPr>
-          <p:cNvPr id="84" name="Shape 8"/>
-          <p:cNvSpPr/>
-          <p:nvPr/>
-        </p:nvSpPr>
-        <p:spPr>
-          <a:xfrm>
-            <a:off x="7201080" y="3560400"/>
-            <a:ext cx="3466800" cy="657000"/>
+          <p:cNvPr id="85" name="Shape 8"/>
+          <p:cNvSpPr/>
+          <p:nvPr/>
+        </p:nvSpPr>
+        <p:spPr>
+          <a:xfrm>
+            <a:off x="7277760" y="3560400"/>
+            <a:ext cx="3466440" cy="656640"/>
           </a:xfrm>
           <a:prstGeom prst="rect">
             <a:avLst/>
@@ -12088,6 +12341,11 @@
             <a:noAutofit/>
           </a:bodyPr>
           <a:p>
+            <a:pPr>
+              <a:lnSpc>
+                <a:spcPct val="100000"/>
+              </a:lnSpc>
+            </a:pPr>
             <a:endParaRPr b="0" lang="en-US" sz="1800" strike="noStrike" u="none">
               <a:solidFill>
                 <a:srgbClr val="000000"/>
@@ -12101,14 +12359,14 @@
       </p:sp>
       <p:sp>
         <p:nvSpPr>
-          <p:cNvPr id="85" name="Text 9"/>
+          <p:cNvPr id="86" name="Text 9"/>
           <p:cNvSpPr/>
           <p:nvPr/>
         </p:nvSpPr>
         <p:spPr>
           <a:xfrm>
             <a:off x="7335360" y="3741120"/>
-            <a:ext cx="3197880" cy="333000"/>
+            <a:ext cx="3197520" cy="332640"/>
           </a:xfrm>
           <a:prstGeom prst="rect">
             <a:avLst/>
@@ -12162,14 +12420,14 @@
       </p:sp>
       <p:sp>
         <p:nvSpPr>
-          <p:cNvPr id="86" name="Text 10"/>
+          <p:cNvPr id="87" name="Text 10"/>
           <p:cNvSpPr/>
           <p:nvPr/>
         </p:nvSpPr>
         <p:spPr>
           <a:xfrm>
             <a:off x="10763280" y="3722040"/>
-            <a:ext cx="456840" cy="371160"/>
+            <a:ext cx="456480" cy="370800"/>
           </a:xfrm>
           <a:prstGeom prst="rect">
             <a:avLst/>
@@ -12223,14 +12481,14 @@
       </p:sp>
       <p:sp>
         <p:nvSpPr>
-          <p:cNvPr id="87" name="Shape 11"/>
+          <p:cNvPr id="88" name="Shape 11"/>
           <p:cNvSpPr/>
           <p:nvPr/>
         </p:nvSpPr>
         <p:spPr>
           <a:xfrm>
             <a:off x="11315880" y="3560400"/>
-            <a:ext cx="3466800" cy="657000"/>
+            <a:ext cx="3466440" cy="656640"/>
           </a:xfrm>
           <a:prstGeom prst="rect">
             <a:avLst/>
@@ -12254,6 +12512,11 @@
             <a:noAutofit/>
           </a:bodyPr>
           <a:p>
+            <a:pPr>
+              <a:lnSpc>
+                <a:spcPct val="100000"/>
+              </a:lnSpc>
+            </a:pPr>
             <a:endParaRPr b="0" lang="en-US" sz="1800" strike="noStrike" u="none">
               <a:solidFill>
                 <a:srgbClr val="000000"/>
@@ -12267,14 +12530,14 @@
       </p:sp>
       <p:sp>
         <p:nvSpPr>
-          <p:cNvPr id="88" name="Text 12"/>
+          <p:cNvPr id="89" name="Text 12"/>
           <p:cNvSpPr/>
           <p:nvPr/>
         </p:nvSpPr>
         <p:spPr>
           <a:xfrm>
             <a:off x="11450160" y="3741120"/>
-            <a:ext cx="3197880" cy="333000"/>
+            <a:ext cx="3197520" cy="332640"/>
           </a:xfrm>
           <a:prstGeom prst="rect">
             <a:avLst/>
@@ -12328,14 +12591,14 @@
       </p:sp>
       <p:sp>
         <p:nvSpPr>
-          <p:cNvPr id="89" name="Text 13"/>
+          <p:cNvPr id="90" name="Text 13"/>
           <p:cNvSpPr/>
           <p:nvPr/>
         </p:nvSpPr>
         <p:spPr>
           <a:xfrm>
             <a:off x="14878080" y="3722040"/>
-            <a:ext cx="456840" cy="371160"/>
+            <a:ext cx="456480" cy="370800"/>
           </a:xfrm>
           <a:prstGeom prst="rect">
             <a:avLst/>
@@ -12389,14 +12652,14 @@
       </p:sp>
       <p:sp>
         <p:nvSpPr>
-          <p:cNvPr id="90" name="Text 14"/>
+          <p:cNvPr id="91" name="Text 14"/>
           <p:cNvSpPr/>
           <p:nvPr/>
         </p:nvSpPr>
         <p:spPr>
           <a:xfrm>
             <a:off x="15430680" y="3741120"/>
-            <a:ext cx="1980720" cy="333000"/>
+            <a:ext cx="1980360" cy="332640"/>
           </a:xfrm>
           <a:prstGeom prst="rect">
             <a:avLst/>
@@ -12450,14 +12713,14 @@
       </p:sp>
       <p:sp>
         <p:nvSpPr>
-          <p:cNvPr id="91" name="Text 15"/>
+          <p:cNvPr id="92" name="Text 15"/>
           <p:cNvSpPr/>
           <p:nvPr/>
         </p:nvSpPr>
         <p:spPr>
           <a:xfrm>
             <a:off x="952560" y="4631760"/>
-            <a:ext cx="2076120" cy="628200"/>
+            <a:ext cx="2075760" cy="627840"/>
           </a:xfrm>
           <a:prstGeom prst="rect">
             <a:avLst/>
@@ -12511,14 +12774,14 @@
       </p:sp>
       <p:sp>
         <p:nvSpPr>
-          <p:cNvPr id="92" name="Shape 16"/>
+          <p:cNvPr id="93" name="Shape 16"/>
           <p:cNvSpPr/>
           <p:nvPr/>
         </p:nvSpPr>
         <p:spPr>
           <a:xfrm>
             <a:off x="3086280" y="4598640"/>
-            <a:ext cx="3466800" cy="657000"/>
+            <a:ext cx="3466440" cy="656640"/>
           </a:xfrm>
           <a:prstGeom prst="rect">
             <a:avLst/>
@@ -12542,6 +12805,11 @@
             <a:noAutofit/>
           </a:bodyPr>
           <a:p>
+            <a:pPr>
+              <a:lnSpc>
+                <a:spcPct val="100000"/>
+              </a:lnSpc>
+            </a:pPr>
             <a:endParaRPr b="0" lang="en-US" sz="1800" strike="noStrike" u="none">
               <a:solidFill>
                 <a:srgbClr val="000000"/>
@@ -12555,14 +12823,14 @@
       </p:sp>
       <p:sp>
         <p:nvSpPr>
-          <p:cNvPr id="93" name="Text 17"/>
+          <p:cNvPr id="94" name="Text 17"/>
           <p:cNvSpPr/>
           <p:nvPr/>
         </p:nvSpPr>
         <p:spPr>
           <a:xfrm>
             <a:off x="3220560" y="4779360"/>
-            <a:ext cx="3197880" cy="333000"/>
+            <a:ext cx="3197520" cy="332640"/>
           </a:xfrm>
           <a:prstGeom prst="rect">
             <a:avLst/>
@@ -12616,14 +12884,14 @@
       </p:sp>
       <p:sp>
         <p:nvSpPr>
-          <p:cNvPr id="94" name="Text 18"/>
+          <p:cNvPr id="95" name="Text 18"/>
           <p:cNvSpPr/>
           <p:nvPr/>
         </p:nvSpPr>
         <p:spPr>
           <a:xfrm>
             <a:off x="6648480" y="4760280"/>
-            <a:ext cx="456840" cy="371160"/>
+            <a:ext cx="456480" cy="370800"/>
           </a:xfrm>
           <a:prstGeom prst="rect">
             <a:avLst/>
@@ -12677,14 +12945,14 @@
       </p:sp>
       <p:sp>
         <p:nvSpPr>
-          <p:cNvPr id="95" name="Text 19"/>
+          <p:cNvPr id="96" name="Text 19"/>
           <p:cNvSpPr/>
           <p:nvPr/>
         </p:nvSpPr>
         <p:spPr>
           <a:xfrm>
             <a:off x="7335360" y="4779360"/>
-            <a:ext cx="3197880" cy="333000"/>
+            <a:ext cx="3197520" cy="332640"/>
           </a:xfrm>
           <a:prstGeom prst="rect">
             <a:avLst/>
@@ -12738,14 +13006,14 @@
       </p:sp>
       <p:sp>
         <p:nvSpPr>
-          <p:cNvPr id="96" name="Text 20"/>
+          <p:cNvPr id="97" name="Text 20"/>
           <p:cNvSpPr/>
           <p:nvPr/>
         </p:nvSpPr>
         <p:spPr>
           <a:xfrm>
             <a:off x="10763280" y="4760280"/>
-            <a:ext cx="456840" cy="371160"/>
+            <a:ext cx="456480" cy="370800"/>
           </a:xfrm>
           <a:prstGeom prst="rect">
             <a:avLst/>
@@ -12799,14 +13067,14 @@
       </p:sp>
       <p:sp>
         <p:nvSpPr>
-          <p:cNvPr id="97" name="Shape 21"/>
+          <p:cNvPr id="98" name="Shape 21"/>
           <p:cNvSpPr/>
           <p:nvPr/>
         </p:nvSpPr>
         <p:spPr>
           <a:xfrm>
             <a:off x="11315880" y="4598640"/>
-            <a:ext cx="3466800" cy="657000"/>
+            <a:ext cx="3466440" cy="656640"/>
           </a:xfrm>
           <a:prstGeom prst="rect">
             <a:avLst/>
@@ -12832,6 +13100,11 @@
             <a:noAutofit/>
           </a:bodyPr>
           <a:p>
+            <a:pPr>
+              <a:lnSpc>
+                <a:spcPct val="100000"/>
+              </a:lnSpc>
+            </a:pPr>
             <a:endParaRPr b="0" lang="en-US" sz="1800" strike="noStrike" u="none">
               <a:solidFill>
                 <a:srgbClr val="000000"/>
@@ -12845,14 +13118,14 @@
       </p:sp>
       <p:sp>
         <p:nvSpPr>
-          <p:cNvPr id="98" name="Text 22"/>
+          <p:cNvPr id="99" name="Text 22"/>
           <p:cNvSpPr/>
           <p:nvPr/>
         </p:nvSpPr>
         <p:spPr>
           <a:xfrm>
             <a:off x="11450160" y="4779360"/>
-            <a:ext cx="3197880" cy="333000"/>
+            <a:ext cx="3197520" cy="332640"/>
           </a:xfrm>
           <a:prstGeom prst="rect">
             <a:avLst/>
@@ -12906,14 +13179,14 @@
       </p:sp>
       <p:sp>
         <p:nvSpPr>
-          <p:cNvPr id="99" name="Text 23"/>
+          <p:cNvPr id="100" name="Text 23"/>
           <p:cNvSpPr/>
           <p:nvPr/>
         </p:nvSpPr>
         <p:spPr>
           <a:xfrm>
             <a:off x="14878080" y="4760280"/>
-            <a:ext cx="456840" cy="371160"/>
+            <a:ext cx="456480" cy="370800"/>
           </a:xfrm>
           <a:prstGeom prst="rect">
             <a:avLst/>
@@ -12967,14 +13240,14 @@
       </p:sp>
       <p:sp>
         <p:nvSpPr>
-          <p:cNvPr id="100" name="Text 24"/>
+          <p:cNvPr id="101" name="Text 24"/>
           <p:cNvSpPr/>
           <p:nvPr/>
         </p:nvSpPr>
         <p:spPr>
           <a:xfrm>
             <a:off x="15430680" y="4779360"/>
-            <a:ext cx="1980720" cy="333000"/>
+            <a:ext cx="1980360" cy="332640"/>
           </a:xfrm>
           <a:prstGeom prst="rect">
             <a:avLst/>
@@ -13028,14 +13301,14 @@
       </p:sp>
       <p:sp>
         <p:nvSpPr>
-          <p:cNvPr id="101" name="Shape 25"/>
+          <p:cNvPr id="102" name="Shape 25"/>
           <p:cNvSpPr/>
           <p:nvPr/>
         </p:nvSpPr>
         <p:spPr>
           <a:xfrm>
             <a:off x="952560" y="5865480"/>
-            <a:ext cx="16382520" cy="9000"/>
+            <a:ext cx="16382160" cy="8640"/>
           </a:xfrm>
           <a:prstGeom prst="rect">
             <a:avLst/>
@@ -13058,6 +13331,11 @@
             <a:noAutofit/>
           </a:bodyPr>
           <a:p>
+            <a:pPr>
+              <a:lnSpc>
+                <a:spcPct val="100000"/>
+              </a:lnSpc>
+            </a:pPr>
             <a:endParaRPr b="0" lang="en-US" sz="1800" strike="noStrike" u="none">
               <a:solidFill>
                 <a:srgbClr val="000000"/>
@@ -13071,14 +13349,14 @@
       </p:sp>
       <p:sp>
         <p:nvSpPr>
-          <p:cNvPr id="102" name="Shape 26"/>
+          <p:cNvPr id="103" name="Shape 26"/>
           <p:cNvSpPr/>
           <p:nvPr/>
         </p:nvSpPr>
         <p:spPr>
           <a:xfrm>
             <a:off x="952560" y="6179760"/>
-            <a:ext cx="3809520" cy="18720"/>
+            <a:ext cx="3809160" cy="18360"/>
           </a:xfrm>
           <a:prstGeom prst="rect">
             <a:avLst/>
@@ -13101,6 +13379,11 @@
             <a:noAutofit/>
           </a:bodyPr>
           <a:p>
+            <a:pPr>
+              <a:lnSpc>
+                <a:spcPct val="100000"/>
+              </a:lnSpc>
+            </a:pPr>
             <a:endParaRPr b="0" lang="en-US" sz="1800" strike="noStrike" u="none">
               <a:solidFill>
                 <a:srgbClr val="ffffff"/>
@@ -13114,14 +13397,14 @@
       </p:sp>
       <p:sp>
         <p:nvSpPr>
-          <p:cNvPr id="103" name="Text 27"/>
+          <p:cNvPr id="104" name="Text 27"/>
           <p:cNvSpPr/>
           <p:nvPr/>
         </p:nvSpPr>
         <p:spPr>
           <a:xfrm>
             <a:off x="952560" y="6370200"/>
-            <a:ext cx="3924000" cy="333000"/>
+            <a:ext cx="3923640" cy="332640"/>
           </a:xfrm>
           <a:prstGeom prst="rect">
             <a:avLst/>
@@ -13175,14 +13458,14 @@
       </p:sp>
       <p:sp>
         <p:nvSpPr>
-          <p:cNvPr id="104" name="Text 28"/>
+          <p:cNvPr id="105" name="Text 28"/>
           <p:cNvSpPr/>
           <p:nvPr/>
         </p:nvSpPr>
         <p:spPr>
           <a:xfrm>
             <a:off x="952560" y="6760800"/>
-            <a:ext cx="3924000" cy="952200"/>
+            <a:ext cx="3923640" cy="951840"/>
           </a:xfrm>
           <a:prstGeom prst="rect">
             <a:avLst/>
@@ -13236,14 +13519,14 @@
       </p:sp>
       <p:sp>
         <p:nvSpPr>
-          <p:cNvPr id="105" name="Text 29"/>
+          <p:cNvPr id="106" name="Text 29"/>
           <p:cNvSpPr/>
           <p:nvPr/>
         </p:nvSpPr>
         <p:spPr>
           <a:xfrm>
             <a:off x="952560" y="7770240"/>
-            <a:ext cx="3924000" cy="371880"/>
+            <a:ext cx="3923640" cy="371520"/>
           </a:xfrm>
           <a:prstGeom prst="rect">
             <a:avLst/>
@@ -13297,14 +13580,14 @@
       </p:sp>
       <p:sp>
         <p:nvSpPr>
-          <p:cNvPr id="106" name="Shape 30"/>
+          <p:cNvPr id="107" name="Shape 30"/>
           <p:cNvSpPr/>
           <p:nvPr/>
         </p:nvSpPr>
         <p:spPr>
           <a:xfrm>
             <a:off x="5143680" y="6179760"/>
-            <a:ext cx="3809520" cy="18720"/>
+            <a:ext cx="3809160" cy="18360"/>
           </a:xfrm>
           <a:prstGeom prst="rect">
             <a:avLst/>
@@ -13327,6 +13610,11 @@
             <a:noAutofit/>
           </a:bodyPr>
           <a:p>
+            <a:pPr>
+              <a:lnSpc>
+                <a:spcPct val="100000"/>
+              </a:lnSpc>
+            </a:pPr>
             <a:endParaRPr b="0" lang="en-US" sz="1800" strike="noStrike" u="none">
               <a:solidFill>
                 <a:srgbClr val="ffffff"/>
@@ -13340,14 +13628,14 @@
       </p:sp>
       <p:sp>
         <p:nvSpPr>
-          <p:cNvPr id="107" name="Text 31"/>
+          <p:cNvPr id="108" name="Text 31"/>
           <p:cNvSpPr/>
           <p:nvPr/>
         </p:nvSpPr>
         <p:spPr>
           <a:xfrm>
             <a:off x="5143680" y="6370200"/>
-            <a:ext cx="3924000" cy="333000"/>
+            <a:ext cx="3923640" cy="332640"/>
           </a:xfrm>
           <a:prstGeom prst="rect">
             <a:avLst/>
@@ -13401,14 +13689,14 @@
       </p:sp>
       <p:sp>
         <p:nvSpPr>
-          <p:cNvPr id="108" name="Text 32"/>
+          <p:cNvPr id="109" name="Text 32"/>
           <p:cNvSpPr/>
           <p:nvPr/>
         </p:nvSpPr>
         <p:spPr>
           <a:xfrm>
             <a:off x="5143680" y="6760800"/>
-            <a:ext cx="3924000" cy="952200"/>
+            <a:ext cx="3923640" cy="951840"/>
           </a:xfrm>
           <a:prstGeom prst="rect">
             <a:avLst/>
@@ -13462,14 +13750,14 @@
       </p:sp>
       <p:sp>
         <p:nvSpPr>
-          <p:cNvPr id="109" name="Text 33"/>
+          <p:cNvPr id="110" name="Text 33"/>
           <p:cNvSpPr/>
           <p:nvPr/>
         </p:nvSpPr>
         <p:spPr>
           <a:xfrm>
             <a:off x="5143680" y="7770240"/>
-            <a:ext cx="3924000" cy="371880"/>
+            <a:ext cx="3923640" cy="371520"/>
           </a:xfrm>
           <a:prstGeom prst="rect">
             <a:avLst/>
@@ -13523,14 +13811,14 @@
       </p:sp>
       <p:sp>
         <p:nvSpPr>
-          <p:cNvPr id="110" name="Shape 34"/>
+          <p:cNvPr id="111" name="Shape 34"/>
           <p:cNvSpPr/>
           <p:nvPr/>
         </p:nvSpPr>
         <p:spPr>
           <a:xfrm>
             <a:off x="9334440" y="6179760"/>
-            <a:ext cx="3809520" cy="18720"/>
+            <a:ext cx="3809160" cy="18360"/>
           </a:xfrm>
           <a:prstGeom prst="rect">
             <a:avLst/>
@@ -13553,6 +13841,11 @@
             <a:noAutofit/>
           </a:bodyPr>
           <a:p>
+            <a:pPr>
+              <a:lnSpc>
+                <a:spcPct val="100000"/>
+              </a:lnSpc>
+            </a:pPr>
             <a:endParaRPr b="0" lang="en-US" sz="1800" strike="noStrike" u="none">
               <a:solidFill>
                 <a:srgbClr val="ffffff"/>
@@ -13566,14 +13859,14 @@
       </p:sp>
       <p:sp>
         <p:nvSpPr>
-          <p:cNvPr id="111" name="Text 35"/>
+          <p:cNvPr id="112" name="Text 35"/>
           <p:cNvSpPr/>
           <p:nvPr/>
         </p:nvSpPr>
         <p:spPr>
           <a:xfrm>
             <a:off x="9334440" y="6370200"/>
-            <a:ext cx="3924000" cy="333000"/>
+            <a:ext cx="3923640" cy="332640"/>
           </a:xfrm>
           <a:prstGeom prst="rect">
             <a:avLst/>
@@ -13627,14 +13920,14 @@
       </p:sp>
       <p:sp>
         <p:nvSpPr>
-          <p:cNvPr id="112" name="Text 36"/>
+          <p:cNvPr id="113" name="Text 36"/>
           <p:cNvSpPr/>
           <p:nvPr/>
         </p:nvSpPr>
         <p:spPr>
           <a:xfrm>
             <a:off x="9334440" y="6760800"/>
-            <a:ext cx="3924000" cy="952200"/>
+            <a:ext cx="3923640" cy="951840"/>
           </a:xfrm>
           <a:prstGeom prst="rect">
             <a:avLst/>
@@ -13688,14 +13981,14 @@
       </p:sp>
       <p:sp>
         <p:nvSpPr>
-          <p:cNvPr id="113" name="Text 37"/>
+          <p:cNvPr id="114" name="Text 37"/>
           <p:cNvSpPr/>
           <p:nvPr/>
         </p:nvSpPr>
         <p:spPr>
           <a:xfrm>
             <a:off x="9334440" y="7770240"/>
-            <a:ext cx="3924000" cy="371880"/>
+            <a:ext cx="3923640" cy="371520"/>
           </a:xfrm>
           <a:prstGeom prst="rect">
             <a:avLst/>
@@ -13749,14 +14042,14 @@
       </p:sp>
       <p:sp>
         <p:nvSpPr>
-          <p:cNvPr id="114" name="Shape 38"/>
+          <p:cNvPr id="115" name="Shape 38"/>
           <p:cNvSpPr/>
           <p:nvPr/>
         </p:nvSpPr>
         <p:spPr>
           <a:xfrm>
             <a:off x="13525560" y="6179760"/>
-            <a:ext cx="3809520" cy="18720"/>
+            <a:ext cx="3809160" cy="18360"/>
           </a:xfrm>
           <a:prstGeom prst="rect">
             <a:avLst/>
@@ -13779,6 +14072,11 @@
             <a:noAutofit/>
           </a:bodyPr>
           <a:p>
+            <a:pPr>
+              <a:lnSpc>
+                <a:spcPct val="100000"/>
+              </a:lnSpc>
+            </a:pPr>
             <a:endParaRPr b="0" lang="en-US" sz="1800" strike="noStrike" u="none">
               <a:solidFill>
                 <a:srgbClr val="ffffff"/>
@@ -13792,14 +14090,14 @@
       </p:sp>
       <p:sp>
         <p:nvSpPr>
-          <p:cNvPr id="115" name="Text 39"/>
+          <p:cNvPr id="116" name="Text 39"/>
           <p:cNvSpPr/>
           <p:nvPr/>
         </p:nvSpPr>
         <p:spPr>
           <a:xfrm>
             <a:off x="13525560" y="6370200"/>
-            <a:ext cx="3924000" cy="333000"/>
+            <a:ext cx="3923640" cy="332640"/>
           </a:xfrm>
           <a:prstGeom prst="rect">
             <a:avLst/>
@@ -13853,14 +14151,14 @@
       </p:sp>
       <p:sp>
         <p:nvSpPr>
-          <p:cNvPr id="116" name="Text 40"/>
+          <p:cNvPr id="117" name="Text 40"/>
           <p:cNvSpPr/>
           <p:nvPr/>
         </p:nvSpPr>
         <p:spPr>
           <a:xfrm>
             <a:off x="13525560" y="6760800"/>
-            <a:ext cx="3924000" cy="952200"/>
+            <a:ext cx="3923640" cy="951840"/>
           </a:xfrm>
           <a:prstGeom prst="rect">
             <a:avLst/>
@@ -13914,14 +14212,14 @@
       </p:sp>
       <p:sp>
         <p:nvSpPr>
-          <p:cNvPr id="117" name="Text 41"/>
+          <p:cNvPr id="118" name="Text 41"/>
           <p:cNvSpPr/>
           <p:nvPr/>
         </p:nvSpPr>
         <p:spPr>
           <a:xfrm>
             <a:off x="13525560" y="7770240"/>
-            <a:ext cx="3924000" cy="371880"/>
+            <a:ext cx="3923640" cy="371520"/>
           </a:xfrm>
           <a:prstGeom prst="rect">
             <a:avLst/>
@@ -13975,14 +14273,14 @@
       </p:sp>
       <p:sp>
         <p:nvSpPr>
-          <p:cNvPr id="118" name="Text 42"/>
+          <p:cNvPr id="119" name="Text 42"/>
           <p:cNvSpPr/>
           <p:nvPr/>
         </p:nvSpPr>
         <p:spPr>
           <a:xfrm>
             <a:off x="952560" y="8333280"/>
-            <a:ext cx="16874280" cy="397800"/>
+            <a:ext cx="16873920" cy="397440"/>
           </a:xfrm>
           <a:prstGeom prst="rect">
             <a:avLst/>
@@ -14036,14 +14334,14 @@
       </p:sp>
       <p:sp>
         <p:nvSpPr>
-          <p:cNvPr id="119" name="Text 43"/>
+          <p:cNvPr id="120" name="Text 43"/>
           <p:cNvSpPr/>
           <p:nvPr/>
         </p:nvSpPr>
         <p:spPr>
           <a:xfrm>
             <a:off x="952560" y="9496440"/>
-            <a:ext cx="1132200" cy="333000"/>
+            <a:ext cx="1131840" cy="332640"/>
           </a:xfrm>
           <a:prstGeom prst="rect">
             <a:avLst/>
@@ -14097,14 +14395,14 @@
       </p:sp>
       <p:sp>
         <p:nvSpPr>
-          <p:cNvPr id="120" name="Text 44"/>
+          <p:cNvPr id="121" name="Text 44"/>
           <p:cNvSpPr/>
           <p:nvPr/>
         </p:nvSpPr>
         <p:spPr>
           <a:xfrm>
             <a:off x="16279200" y="9496440"/>
-            <a:ext cx="1132200" cy="333000"/>
+            <a:ext cx="1131840" cy="332640"/>
           </a:xfrm>
           <a:prstGeom prst="rect">
             <a:avLst/>
@@ -14195,14 +14493,14 @@
       </p:grpSpPr>
       <p:sp>
         <p:nvSpPr>
-          <p:cNvPr id="121" name="Text 0"/>
+          <p:cNvPr id="122" name="Text 0"/>
           <p:cNvSpPr/>
           <p:nvPr/>
         </p:nvSpPr>
         <p:spPr>
           <a:xfrm>
             <a:off x="952560" y="457200"/>
-            <a:ext cx="1354680" cy="333000"/>
+            <a:ext cx="1354320" cy="332640"/>
           </a:xfrm>
           <a:prstGeom prst="rect">
             <a:avLst/>
@@ -14256,14 +14554,14 @@
       </p:sp>
       <p:sp>
         <p:nvSpPr>
-          <p:cNvPr id="122" name="Text 1"/>
+          <p:cNvPr id="123" name="Text 1"/>
           <p:cNvSpPr/>
           <p:nvPr/>
         </p:nvSpPr>
         <p:spPr>
           <a:xfrm>
             <a:off x="16247160" y="457200"/>
-            <a:ext cx="1164240" cy="333000"/>
+            <a:ext cx="1163880" cy="332640"/>
           </a:xfrm>
           <a:prstGeom prst="rect">
             <a:avLst/>
@@ -14317,14 +14615,14 @@
       </p:sp>
       <p:sp>
         <p:nvSpPr>
-          <p:cNvPr id="123" name="Text 2"/>
+          <p:cNvPr id="124" name="Text 2"/>
           <p:cNvSpPr/>
           <p:nvPr/>
         </p:nvSpPr>
         <p:spPr>
           <a:xfrm>
             <a:off x="952560" y="1047600"/>
-            <a:ext cx="16874280" cy="333000"/>
+            <a:ext cx="16873920" cy="332640"/>
           </a:xfrm>
           <a:prstGeom prst="rect">
             <a:avLst/>
@@ -14378,14 +14676,14 @@
       </p:sp>
       <p:sp>
         <p:nvSpPr>
-          <p:cNvPr id="124" name="Text 3"/>
+          <p:cNvPr id="125" name="Text 3"/>
           <p:cNvSpPr/>
           <p:nvPr/>
         </p:nvSpPr>
         <p:spPr>
           <a:xfrm>
             <a:off x="952560" y="1685880"/>
-            <a:ext cx="15696720" cy="708120"/>
+            <a:ext cx="15696360" cy="707760"/>
           </a:xfrm>
           <a:prstGeom prst="rect">
             <a:avLst/>
@@ -14439,14 +14737,14 @@
       </p:sp>
       <p:sp>
         <p:nvSpPr>
-          <p:cNvPr id="125" name="Shape 4"/>
+          <p:cNvPr id="126" name="Shape 4"/>
           <p:cNvSpPr/>
           <p:nvPr/>
         </p:nvSpPr>
         <p:spPr>
           <a:xfrm>
             <a:off x="952560" y="3118320"/>
-            <a:ext cx="5079600" cy="18720"/>
+            <a:ext cx="5079240" cy="18360"/>
           </a:xfrm>
           <a:prstGeom prst="rect">
             <a:avLst/>
@@ -14469,6 +14767,11 @@
             <a:noAutofit/>
           </a:bodyPr>
           <a:p>
+            <a:pPr>
+              <a:lnSpc>
+                <a:spcPct val="100000"/>
+              </a:lnSpc>
+            </a:pPr>
             <a:endParaRPr b="0" lang="en-US" sz="1800" strike="noStrike" u="none">
               <a:solidFill>
                 <a:srgbClr val="ffffff"/>
@@ -14482,14 +14785,14 @@
       </p:sp>
       <p:sp>
         <p:nvSpPr>
-          <p:cNvPr id="126" name="Text 5"/>
+          <p:cNvPr id="127" name="Text 5"/>
           <p:cNvSpPr/>
           <p:nvPr/>
         </p:nvSpPr>
         <p:spPr>
           <a:xfrm>
             <a:off x="952560" y="3308760"/>
-            <a:ext cx="5231880" cy="333000"/>
+            <a:ext cx="5231520" cy="332640"/>
           </a:xfrm>
           <a:prstGeom prst="rect">
             <a:avLst/>
@@ -14543,14 +14846,14 @@
       </p:sp>
       <p:sp>
         <p:nvSpPr>
-          <p:cNvPr id="127" name="Text 6"/>
+          <p:cNvPr id="128" name="Text 6"/>
           <p:cNvSpPr/>
           <p:nvPr/>
         </p:nvSpPr>
         <p:spPr>
           <a:xfrm>
             <a:off x="952560" y="3699360"/>
-            <a:ext cx="5231880" cy="723600"/>
+            <a:ext cx="5231520" cy="723240"/>
           </a:xfrm>
           <a:prstGeom prst="rect">
             <a:avLst/>
@@ -14604,14 +14907,14 @@
       </p:sp>
       <p:sp>
         <p:nvSpPr>
-          <p:cNvPr id="128" name="Text 7"/>
+          <p:cNvPr id="129" name="Text 7"/>
           <p:cNvSpPr/>
           <p:nvPr/>
         </p:nvSpPr>
         <p:spPr>
           <a:xfrm>
             <a:off x="952560" y="4480560"/>
-            <a:ext cx="5231880" cy="811080"/>
+            <a:ext cx="5231520" cy="810720"/>
           </a:xfrm>
           <a:prstGeom prst="rect">
             <a:avLst/>
@@ -14665,14 +14968,14 @@
       </p:sp>
       <p:sp>
         <p:nvSpPr>
-          <p:cNvPr id="129" name="Shape 8"/>
+          <p:cNvPr id="130" name="Shape 8"/>
           <p:cNvSpPr/>
           <p:nvPr/>
         </p:nvSpPr>
         <p:spPr>
           <a:xfrm>
             <a:off x="6603840" y="3118320"/>
-            <a:ext cx="5079600" cy="18720"/>
+            <a:ext cx="5079240" cy="18360"/>
           </a:xfrm>
           <a:prstGeom prst="rect">
             <a:avLst/>
@@ -14695,6 +14998,11 @@
             <a:noAutofit/>
           </a:bodyPr>
           <a:p>
+            <a:pPr>
+              <a:lnSpc>
+                <a:spcPct val="100000"/>
+              </a:lnSpc>
+            </a:pPr>
             <a:endParaRPr b="0" lang="en-US" sz="1800" strike="noStrike" u="none">
               <a:solidFill>
                 <a:srgbClr val="ffffff"/>
@@ -14708,14 +15016,14 @@
       </p:sp>
       <p:sp>
         <p:nvSpPr>
-          <p:cNvPr id="130" name="Text 9"/>
+          <p:cNvPr id="131" name="Text 9"/>
           <p:cNvSpPr/>
           <p:nvPr/>
         </p:nvSpPr>
         <p:spPr>
           <a:xfrm>
             <a:off x="6603840" y="3308760"/>
-            <a:ext cx="5231880" cy="333000"/>
+            <a:ext cx="5231520" cy="332640"/>
           </a:xfrm>
           <a:prstGeom prst="rect">
             <a:avLst/>
@@ -14769,14 +15077,14 @@
       </p:sp>
       <p:sp>
         <p:nvSpPr>
-          <p:cNvPr id="131" name="Text 10"/>
+          <p:cNvPr id="132" name="Text 10"/>
           <p:cNvSpPr/>
           <p:nvPr/>
         </p:nvSpPr>
         <p:spPr>
           <a:xfrm>
             <a:off x="6603840" y="3699360"/>
-            <a:ext cx="5231880" cy="723600"/>
+            <a:ext cx="5231520" cy="723240"/>
           </a:xfrm>
           <a:prstGeom prst="rect">
             <a:avLst/>
@@ -14830,14 +15138,14 @@
       </p:sp>
       <p:sp>
         <p:nvSpPr>
-          <p:cNvPr id="132" name="Text 11"/>
+          <p:cNvPr id="133" name="Text 11"/>
           <p:cNvSpPr/>
           <p:nvPr/>
         </p:nvSpPr>
         <p:spPr>
           <a:xfrm>
             <a:off x="6603840" y="4480560"/>
-            <a:ext cx="5231880" cy="424440"/>
+            <a:ext cx="5231520" cy="424080"/>
           </a:xfrm>
           <a:prstGeom prst="rect">
             <a:avLst/>
@@ -14891,14 +15199,14 @@
       </p:sp>
       <p:sp>
         <p:nvSpPr>
-          <p:cNvPr id="133" name="Shape 12"/>
+          <p:cNvPr id="134" name="Shape 12"/>
           <p:cNvSpPr/>
           <p:nvPr/>
         </p:nvSpPr>
         <p:spPr>
           <a:xfrm>
             <a:off x="12255480" y="3118320"/>
-            <a:ext cx="5079600" cy="18720"/>
+            <a:ext cx="5079240" cy="18360"/>
           </a:xfrm>
           <a:prstGeom prst="rect">
             <a:avLst/>
@@ -14921,6 +15229,11 @@
             <a:noAutofit/>
           </a:bodyPr>
           <a:p>
+            <a:pPr>
+              <a:lnSpc>
+                <a:spcPct val="100000"/>
+              </a:lnSpc>
+            </a:pPr>
             <a:endParaRPr b="0" lang="en-US" sz="1800" strike="noStrike" u="none">
               <a:solidFill>
                 <a:srgbClr val="ffffff"/>
@@ -14934,14 +15247,14 @@
       </p:sp>
       <p:sp>
         <p:nvSpPr>
-          <p:cNvPr id="134" name="Text 13"/>
+          <p:cNvPr id="135" name="Text 13"/>
           <p:cNvSpPr/>
           <p:nvPr/>
         </p:nvSpPr>
         <p:spPr>
           <a:xfrm>
             <a:off x="12255480" y="3308760"/>
-            <a:ext cx="5231880" cy="333000"/>
+            <a:ext cx="5231520" cy="332640"/>
           </a:xfrm>
           <a:prstGeom prst="rect">
             <a:avLst/>
@@ -14995,14 +15308,14 @@
       </p:sp>
       <p:sp>
         <p:nvSpPr>
-          <p:cNvPr id="135" name="Text 14"/>
+          <p:cNvPr id="136" name="Text 14"/>
           <p:cNvSpPr/>
           <p:nvPr/>
         </p:nvSpPr>
         <p:spPr>
           <a:xfrm>
             <a:off x="12255480" y="3699360"/>
-            <a:ext cx="5231880" cy="723600"/>
+            <a:ext cx="5231520" cy="723240"/>
           </a:xfrm>
           <a:prstGeom prst="rect">
             <a:avLst/>
@@ -15056,14 +15369,14 @@
       </p:sp>
       <p:sp>
         <p:nvSpPr>
-          <p:cNvPr id="136" name="Text 15"/>
+          <p:cNvPr id="137" name="Text 15"/>
           <p:cNvSpPr/>
           <p:nvPr/>
         </p:nvSpPr>
         <p:spPr>
           <a:xfrm>
             <a:off x="12255480" y="4480560"/>
-            <a:ext cx="5231880" cy="424440"/>
+            <a:ext cx="5231520" cy="424080"/>
           </a:xfrm>
           <a:prstGeom prst="rect">
             <a:avLst/>
@@ -15117,14 +15430,14 @@
       </p:sp>
       <p:sp>
         <p:nvSpPr>
-          <p:cNvPr id="137" name="Shape 16"/>
+          <p:cNvPr id="138" name="Shape 16"/>
           <p:cNvSpPr/>
           <p:nvPr/>
         </p:nvSpPr>
         <p:spPr>
           <a:xfrm>
             <a:off x="952560" y="5863320"/>
-            <a:ext cx="16382520" cy="618840"/>
+            <a:ext cx="16382160" cy="618480"/>
           </a:xfrm>
           <a:prstGeom prst="rect">
             <a:avLst/>
@@ -15147,6 +15460,11 @@
             <a:noAutofit/>
           </a:bodyPr>
           <a:p>
+            <a:pPr>
+              <a:lnSpc>
+                <a:spcPct val="100000"/>
+              </a:lnSpc>
+            </a:pPr>
             <a:endParaRPr b="0" lang="en-US" sz="1800" strike="noStrike" u="none">
               <a:solidFill>
                 <a:srgbClr val="000000"/>
@@ -15160,14 +15478,14 @@
       </p:sp>
       <p:sp>
         <p:nvSpPr>
-          <p:cNvPr id="138" name="Text 17"/>
+          <p:cNvPr id="139" name="Text 17"/>
           <p:cNvSpPr/>
           <p:nvPr/>
         </p:nvSpPr>
         <p:spPr>
           <a:xfrm>
             <a:off x="1162080" y="5996880"/>
-            <a:ext cx="16454880" cy="390240"/>
+            <a:ext cx="16454520" cy="389880"/>
           </a:xfrm>
           <a:prstGeom prst="rect">
             <a:avLst/>
@@ -15221,14 +15539,14 @@
       </p:sp>
       <p:sp>
         <p:nvSpPr>
-          <p:cNvPr id="139" name="Text 18"/>
+          <p:cNvPr id="140" name="Text 18"/>
           <p:cNvSpPr/>
           <p:nvPr/>
         </p:nvSpPr>
         <p:spPr>
           <a:xfrm>
             <a:off x="952560" y="9496440"/>
-            <a:ext cx="2641320" cy="333000"/>
+            <a:ext cx="2640960" cy="332640"/>
           </a:xfrm>
           <a:prstGeom prst="rect">
             <a:avLst/>
@@ -15282,14 +15600,14 @@
       </p:sp>
       <p:sp>
         <p:nvSpPr>
-          <p:cNvPr id="140" name="Text 19"/>
+          <p:cNvPr id="141" name="Text 19"/>
           <p:cNvSpPr/>
           <p:nvPr/>
         </p:nvSpPr>
         <p:spPr>
           <a:xfrm>
             <a:off x="16279200" y="9496440"/>
-            <a:ext cx="1132200" cy="333000"/>
+            <a:ext cx="1131840" cy="332640"/>
           </a:xfrm>
           <a:prstGeom prst="rect">
             <a:avLst/>
@@ -15380,14 +15698,14 @@
       </p:grpSpPr>
       <p:sp>
         <p:nvSpPr>
-          <p:cNvPr id="141" name="Text 0"/>
+          <p:cNvPr id="142" name="Text 0"/>
           <p:cNvSpPr/>
           <p:nvPr/>
         </p:nvSpPr>
         <p:spPr>
           <a:xfrm>
             <a:off x="952560" y="457200"/>
-            <a:ext cx="1354680" cy="333000"/>
+            <a:ext cx="1354320" cy="332640"/>
           </a:xfrm>
           <a:prstGeom prst="rect">
             <a:avLst/>
@@ -15441,14 +15759,14 @@
       </p:sp>
       <p:sp>
         <p:nvSpPr>
-          <p:cNvPr id="142" name="Text 1"/>
+          <p:cNvPr id="143" name="Text 1"/>
           <p:cNvSpPr/>
           <p:nvPr/>
         </p:nvSpPr>
         <p:spPr>
           <a:xfrm>
             <a:off x="16247160" y="457200"/>
-            <a:ext cx="1164240" cy="333000"/>
+            <a:ext cx="1163880" cy="332640"/>
           </a:xfrm>
           <a:prstGeom prst="rect">
             <a:avLst/>
@@ -15502,14 +15820,14 @@
       </p:sp>
       <p:sp>
         <p:nvSpPr>
-          <p:cNvPr id="143" name="Text 2"/>
+          <p:cNvPr id="144" name="Text 2"/>
           <p:cNvSpPr/>
           <p:nvPr/>
         </p:nvSpPr>
         <p:spPr>
           <a:xfrm>
             <a:off x="952560" y="1047600"/>
-            <a:ext cx="16874280" cy="333000"/>
+            <a:ext cx="16873920" cy="332640"/>
           </a:xfrm>
           <a:prstGeom prst="rect">
             <a:avLst/>
@@ -15563,14 +15881,14 @@
       </p:sp>
       <p:sp>
         <p:nvSpPr>
-          <p:cNvPr id="144" name="Text 3"/>
+          <p:cNvPr id="145" name="Text 3"/>
           <p:cNvSpPr/>
           <p:nvPr/>
         </p:nvSpPr>
         <p:spPr>
           <a:xfrm>
             <a:off x="952560" y="1685880"/>
-            <a:ext cx="16678080" cy="708120"/>
+            <a:ext cx="16677720" cy="707760"/>
           </a:xfrm>
           <a:prstGeom prst="rect">
             <a:avLst/>
@@ -15624,14 +15942,14 @@
       </p:sp>
       <p:sp>
         <p:nvSpPr>
-          <p:cNvPr id="145" name="Shape 4"/>
+          <p:cNvPr id="146" name="Shape 4"/>
           <p:cNvSpPr/>
           <p:nvPr/>
         </p:nvSpPr>
         <p:spPr>
           <a:xfrm>
             <a:off x="952560" y="2813760"/>
-            <a:ext cx="8000640" cy="4082400"/>
+            <a:ext cx="8000280" cy="4082040"/>
           </a:xfrm>
           <a:prstGeom prst="rect">
             <a:avLst/>
@@ -15657,6 +15975,11 @@
             <a:noAutofit/>
           </a:bodyPr>
           <a:p>
+            <a:pPr>
+              <a:lnSpc>
+                <a:spcPct val="100000"/>
+              </a:lnSpc>
+            </a:pPr>
             <a:endParaRPr b="0" lang="en-US" sz="1800" strike="noStrike" u="none">
               <a:solidFill>
                 <a:srgbClr val="000000"/>
@@ -15670,14 +15993,14 @@
       </p:sp>
       <p:sp>
         <p:nvSpPr>
-          <p:cNvPr id="146" name="Text 5"/>
+          <p:cNvPr id="147" name="Text 5"/>
           <p:cNvSpPr/>
           <p:nvPr/>
         </p:nvSpPr>
         <p:spPr>
           <a:xfrm>
             <a:off x="1228680" y="3051720"/>
-            <a:ext cx="7671600" cy="333000"/>
+            <a:ext cx="7671240" cy="332640"/>
           </a:xfrm>
           <a:prstGeom prst="rect">
             <a:avLst/>
@@ -15731,7 +16054,7 @@
       </p:sp>
       <p:pic>
         <p:nvPicPr>
-          <p:cNvPr id="147" name="Image 0" descr="preencoded.png"/>
+          <p:cNvPr id="148" name="Image 0" descr="preencoded.png"/>
           <p:cNvPicPr/>
           <p:nvPr/>
         </p:nvPicPr>
@@ -15742,7 +16065,7 @@
         <p:spPr>
           <a:xfrm>
             <a:off x="1228680" y="3480480"/>
-            <a:ext cx="7448040" cy="2792880"/>
+            <a:ext cx="7447680" cy="2792520"/>
           </a:xfrm>
           <a:prstGeom prst="rect">
             <a:avLst/>
@@ -15755,14 +16078,14 @@
       </p:pic>
       <p:sp>
         <p:nvSpPr>
-          <p:cNvPr id="148" name="Text 6"/>
+          <p:cNvPr id="149" name="Text 6"/>
           <p:cNvSpPr/>
           <p:nvPr/>
         </p:nvSpPr>
         <p:spPr>
           <a:xfrm>
             <a:off x="1228680" y="6406920"/>
-            <a:ext cx="7671600" cy="346320"/>
+            <a:ext cx="7671240" cy="345960"/>
           </a:xfrm>
           <a:prstGeom prst="rect">
             <a:avLst/>
@@ -15816,14 +16139,14 @@
       </p:sp>
       <p:sp>
         <p:nvSpPr>
-          <p:cNvPr id="149" name="Shape 7"/>
+          <p:cNvPr id="150" name="Shape 7"/>
           <p:cNvSpPr/>
           <p:nvPr/>
         </p:nvSpPr>
         <p:spPr>
           <a:xfrm>
             <a:off x="9334440" y="2813760"/>
-            <a:ext cx="8000640" cy="4082400"/>
+            <a:ext cx="8000280" cy="4082040"/>
           </a:xfrm>
           <a:prstGeom prst="rect">
             <a:avLst/>
@@ -15849,6 +16172,11 @@
             <a:noAutofit/>
           </a:bodyPr>
           <a:p>
+            <a:pPr>
+              <a:lnSpc>
+                <a:spcPct val="100000"/>
+              </a:lnSpc>
+            </a:pPr>
             <a:endParaRPr b="0" lang="en-US" sz="1800" strike="noStrike" u="none">
               <a:solidFill>
                 <a:srgbClr val="000000"/>
@@ -15862,14 +16190,14 @@
       </p:sp>
       <p:sp>
         <p:nvSpPr>
-          <p:cNvPr id="150" name="Text 8"/>
+          <p:cNvPr id="151" name="Text 8"/>
           <p:cNvSpPr/>
           <p:nvPr/>
         </p:nvSpPr>
         <p:spPr>
           <a:xfrm>
             <a:off x="9610560" y="3051720"/>
-            <a:ext cx="7671600" cy="333000"/>
+            <a:ext cx="7671240" cy="332640"/>
           </a:xfrm>
           <a:prstGeom prst="rect">
             <a:avLst/>
@@ -15923,7 +16251,7 @@
       </p:sp>
       <p:pic>
         <p:nvPicPr>
-          <p:cNvPr id="151" name="Image 1" descr="preencoded.png"/>
+          <p:cNvPr id="152" name="Image 1" descr="preencoded.png"/>
           <p:cNvPicPr/>
           <p:nvPr/>
         </p:nvPicPr>
@@ -15934,7 +16262,7 @@
         <p:spPr>
           <a:xfrm>
             <a:off x="9610560" y="3480480"/>
-            <a:ext cx="7448040" cy="2792880"/>
+            <a:ext cx="7447680" cy="2792520"/>
           </a:xfrm>
           <a:prstGeom prst="rect">
             <a:avLst/>
@@ -15947,14 +16275,14 @@
       </p:pic>
       <p:sp>
         <p:nvSpPr>
-          <p:cNvPr id="152" name="Text 9"/>
+          <p:cNvPr id="153" name="Text 9"/>
           <p:cNvSpPr/>
           <p:nvPr/>
         </p:nvSpPr>
         <p:spPr>
           <a:xfrm>
             <a:off x="9610560" y="6406920"/>
-            <a:ext cx="7671600" cy="346320"/>
+            <a:ext cx="7671240" cy="345960"/>
           </a:xfrm>
           <a:prstGeom prst="rect">
             <a:avLst/>
@@ -16008,14 +16336,14 @@
       </p:sp>
       <p:sp>
         <p:nvSpPr>
-          <p:cNvPr id="153" name="Text 10"/>
+          <p:cNvPr id="154" name="Text 10"/>
           <p:cNvSpPr/>
           <p:nvPr/>
         </p:nvSpPr>
         <p:spPr>
           <a:xfrm>
             <a:off x="952560" y="9496440"/>
-            <a:ext cx="3418560" cy="333000"/>
+            <a:ext cx="3418200" cy="332640"/>
           </a:xfrm>
           <a:prstGeom prst="rect">
             <a:avLst/>
@@ -16069,14 +16397,14 @@
       </p:sp>
       <p:sp>
         <p:nvSpPr>
-          <p:cNvPr id="154" name="Text 11"/>
+          <p:cNvPr id="155" name="Text 11"/>
           <p:cNvSpPr/>
           <p:nvPr/>
         </p:nvSpPr>
         <p:spPr>
           <a:xfrm>
             <a:off x="16279200" y="9496440"/>
-            <a:ext cx="1132200" cy="333000"/>
+            <a:ext cx="1131840" cy="332640"/>
           </a:xfrm>
           <a:prstGeom prst="rect">
             <a:avLst/>
